--- a/app/examples/saas_metrics/report.pptx
+++ b/app/examples/saas_metrics/report.pptx
@@ -3118,11 +3118,11 @@
             <a:r>
               <a:rPr sz="4600" b="1">
                 <a:solidFill>
-                  <a:srgbClr val="1F2A44"/>
-                </a:solidFill>
-                <a:latin typeface="Georgia"/>
+                  <a:srgbClr val="211747"/>
+                </a:solidFill>
+                <a:latin typeface="Trebuchet MS"/>
               </a:rPr>
-              <a:t>Monthly MRR Performance Analysis</a:t>
+              <a:t>Monthly MRR Performance Review</a:t>
             </a:r>
           </a:p>
         </p:txBody>
@@ -3154,7 +3154,7 @@
                 <a:solidFill>
                   <a:srgbClr val="7A828C"/>
                 </a:solidFill>
-                <a:latin typeface="Arial"/>
+                <a:latin typeface="Trebuchet MS"/>
               </a:rPr>
               <a:t>Period 2026-05  |  source table: ex_saas_metrics</a:t>
             </a:r>
@@ -3188,9 +3188,9 @@
                 <a:solidFill>
                   <a:srgbClr val="7A828C"/>
                 </a:solidFill>
-                <a:latin typeface="Arial"/>
+                <a:latin typeface="Trebuchet MS"/>
               </a:rPr>
-              <a:t>Generated 2026-06-10 15:44 UTC   |   CONFIDENTIAL</a:t>
+              <a:t>Generated 2026-06-10 17:37 UTC   |   CONFIDENTIAL</a:t>
             </a:r>
           </a:p>
         </p:txBody>
@@ -3238,9 +3238,9 @@
             <a:r>
               <a:rPr sz="1300" b="1">
                 <a:solidFill>
-                  <a:srgbClr val="2E6DB4"/>
-                </a:solidFill>
-                <a:latin typeface="Arial"/>
+                  <a:srgbClr val="6C4BF0"/>
+                </a:solidFill>
+                <a:latin typeface="Trebuchet MS"/>
               </a:rPr>
               <a:t>EXECUTIVE SUMMARY</a:t>
             </a:r>
@@ -3272,11 +3272,11 @@
             <a:r>
               <a:rPr sz="3000" b="1">
                 <a:solidFill>
-                  <a:srgbClr val="1F2A44"/>
-                </a:solidFill>
-                <a:latin typeface="Georgia"/>
+                  <a:srgbClr val="211747"/>
+                </a:solidFill>
+                <a:latin typeface="Trebuchet MS"/>
               </a:rPr>
-              <a:t>Steady growth in total MRR signals positive momentum despite regional challenges.</a:t>
+              <a:t>Sustained growth in MRR highlights resilience despite regional challenges.</a:t>
             </a:r>
           </a:p>
         </p:txBody>
@@ -3308,7 +3308,7 @@
                 <a:solidFill>
                   <a:srgbClr val="7A828C"/>
                 </a:solidFill>
-                <a:latin typeface="Arial"/>
+                <a:latin typeface="Trebuchet MS"/>
               </a:rPr>
               <a:t>Source: figures verified against the source data.</a:t>
             </a:r>
@@ -3345,7 +3345,7 @@
             <a:r>
               <a:rPr sz="1600" b="1">
                 <a:solidFill>
-                  <a:srgbClr val="2E6DB4"/>
+                  <a:srgbClr val="6C4BF0"/>
                 </a:solidFill>
               </a:rPr>
               <a:t>●  </a:t>
@@ -3355,9 +3355,9 @@
                 <a:solidFill>
                   <a:srgbClr val="3C4450"/>
                 </a:solidFill>
-                <a:latin typeface="Arial"/>
+                <a:latin typeface="Trebuchet MS"/>
               </a:rPr>
-              <a:t>Total MRR increased to $1.56M, reflecting a growth of +1.2%.</a:t>
+              <a:t>Total MRR reached $1.56M in 2026-05, up +1.2% from $1.54M in 2026-04.</a:t>
             </a:r>
           </a:p>
           <a:p>
@@ -3369,7 +3369,7 @@
             <a:r>
               <a:rPr sz="1600" b="1">
                 <a:solidFill>
-                  <a:srgbClr val="2E6DB4"/>
+                  <a:srgbClr val="6C4BF0"/>
                 </a:solidFill>
               </a:rPr>
               <a:t>●  </a:t>
@@ -3379,9 +3379,9 @@
                 <a:solidFill>
                   <a:srgbClr val="3C4450"/>
                 </a:solidFill>
-                <a:latin typeface="Arial"/>
+                <a:latin typeface="Trebuchet MS"/>
               </a:rPr>
-              <a:t>Enterprise remains the top plan at $805k, comprising 51.6% of total MRR.</a:t>
+              <a:t>Enterprise plan leads at $805k, representing 51.6% of total MRR.</a:t>
             </a:r>
           </a:p>
           <a:p>
@@ -3393,7 +3393,7 @@
             <a:r>
               <a:rPr sz="1600" b="1">
                 <a:solidFill>
-                  <a:srgbClr val="2E6DB4"/>
+                  <a:srgbClr val="6C4BF0"/>
                 </a:solidFill>
               </a:rPr>
               <a:t>●  </a:t>
@@ -3403,7 +3403,7 @@
                 <a:solidFill>
                   <a:srgbClr val="3C4450"/>
                 </a:solidFill>
-                <a:latin typeface="Arial"/>
+                <a:latin typeface="Trebuchet MS"/>
               </a:rPr>
               <a:t>Business plan experienced a decline of -$10k compared to the prior month.</a:t>
             </a:r>
@@ -3417,7 +3417,7 @@
             <a:r>
               <a:rPr sz="1600" b="1">
                 <a:solidFill>
-                  <a:srgbClr val="2E6DB4"/>
+                  <a:srgbClr val="6C4BF0"/>
                 </a:solidFill>
               </a:rPr>
               <a:t>●  </a:t>
@@ -3427,9 +3427,9 @@
                 <a:solidFill>
                   <a:srgbClr val="3C4450"/>
                 </a:solidFill>
-                <a:latin typeface="Arial"/>
+                <a:latin typeface="Trebuchet MS"/>
               </a:rPr>
-              <a:t>North America leads regions with $532k, accounting for 34.1% of total MRR.</a:t>
+              <a:t>North America remains the top region at $532k, accounting for 34.1% of total MRR.</a:t>
             </a:r>
           </a:p>
           <a:p>
@@ -3441,7 +3441,7 @@
             <a:r>
               <a:rPr sz="1600" b="1">
                 <a:solidFill>
-                  <a:srgbClr val="2E6DB4"/>
+                  <a:srgbClr val="6C4BF0"/>
                 </a:solidFill>
               </a:rPr>
               <a:t>●  </a:t>
@@ -3451,7 +3451,7 @@
                 <a:solidFill>
                   <a:srgbClr val="3C4450"/>
                 </a:solidFill>
-                <a:latin typeface="Arial"/>
+                <a:latin typeface="Trebuchet MS"/>
               </a:rPr>
               <a:t>North America saw a decline of -$14k versus the previous month.</a:t>
             </a:r>
@@ -3501,9 +3501,9 @@
             <a:r>
               <a:rPr sz="1300" b="1">
                 <a:solidFill>
-                  <a:srgbClr val="2E6DB4"/>
-                </a:solidFill>
-                <a:latin typeface="Arial"/>
+                  <a:srgbClr val="6C4BF0"/>
+                </a:solidFill>
+                <a:latin typeface="Trebuchet MS"/>
               </a:rPr>
               <a:t>FINANCIAL PERFORMANCE</a:t>
             </a:r>
@@ -3535,11 +3535,11 @@
             <a:r>
               <a:rPr sz="3000" b="1">
                 <a:solidFill>
-                  <a:srgbClr val="1F2A44"/>
-                </a:solidFill>
-                <a:latin typeface="Georgia"/>
+                  <a:srgbClr val="211747"/>
+                </a:solidFill>
+                <a:latin typeface="Trebuchet MS"/>
               </a:rPr>
-              <a:t>Total MRR reached $1.56M in May, marking a 1.2% increase from April.</a:t>
+              <a:t>Total MRR reached $1.56M in May, marking a peak month performance.</a:t>
             </a:r>
           </a:p>
         </p:txBody>
@@ -3571,7 +3571,7 @@
                 <a:solidFill>
                   <a:srgbClr val="7A828C"/>
                 </a:solidFill>
-                <a:latin typeface="Arial"/>
+                <a:latin typeface="Trebuchet MS"/>
               </a:rPr>
               <a:t>Source: performance: Monthly mrr, verified against the data.</a:t>
             </a:r>
@@ -3629,9 +3629,9 @@
                 <a:solidFill>
                   <a:srgbClr val="7A828C"/>
                 </a:solidFill>
-                <a:latin typeface="Arial"/>
+                <a:latin typeface="Trebuchet MS"/>
               </a:rPr>
-              <a:t>In May 2026, total MRR was $1.56M, up from $1.54M in April, reflecting a growth of $18k. This month also represents a seasonal peak, matching the highest MRR recorded in the last 12 months. The recent trend shows a steady increase from $1.45M in January to this peak in May, indicating a positive trajectory in monthly performance.</a:t>
+              <a:t>In May 2026, total MRR increased to $1.56M from $1.54M in April, reflecting a growth of +1.2% or +$18k. This performance represents a seasonal peak, matching the highest MRR recorded in the past year. The trend shows consistent growth over the last several months, indicating a strong upward trajectory in monthly recurring revenue.</a:t>
             </a:r>
           </a:p>
         </p:txBody>
@@ -3651,7 +3651,7 @@
             <a:avLst/>
           </a:prstGeom>
           <a:solidFill>
-            <a:srgbClr val="1F2A44"/>
+            <a:srgbClr val="211747"/>
           </a:solidFill>
           <a:ln>
             <a:noFill/>
@@ -3682,7 +3682,7 @@
                 <a:solidFill>
                   <a:srgbClr val="FFFFFF"/>
                 </a:solidFill>
-                <a:latin typeface="Arial"/>
+                <a:latin typeface="Trebuchet MS"/>
               </a:rPr>
               <a:t>KEY TAKEAWAY</a:t>
             </a:r>
@@ -3741,9 +3741,9 @@
                 <a:solidFill>
                   <a:srgbClr val="3C4450"/>
                 </a:solidFill>
-                <a:latin typeface="Arial"/>
+                <a:latin typeface="Trebuchet MS"/>
               </a:rPr>
-              <a:t>Sustained growth in MRR suggests strong market demand and effective retention strategies.</a:t>
+              <a:t>Sustained growth in MRR highlights strong market demand and effective customer retention strategies.</a:t>
             </a:r>
           </a:p>
           <a:p>
@@ -3757,9 +3757,9 @@
                 <a:solidFill>
                   <a:srgbClr val="3C4450"/>
                 </a:solidFill>
-                <a:latin typeface="Arial"/>
+                <a:latin typeface="Trebuchet MS"/>
               </a:rPr>
-              <a:t>•  MRR increased by $18k from April to May.</a:t>
+              <a:t>•  May 2026 MRR matches the peak of $1.56M.</a:t>
             </a:r>
           </a:p>
           <a:p>
@@ -3773,9 +3773,9 @@
                 <a:solidFill>
                   <a:srgbClr val="3C4450"/>
                 </a:solidFill>
-                <a:latin typeface="Arial"/>
+                <a:latin typeface="Trebuchet MS"/>
               </a:rPr>
-              <a:t>•  May's MRR matches the peak of $1.56M.</a:t>
+              <a:t>•  April 2026 MRR was $1.54M, showing steady growth.</a:t>
             </a:r>
           </a:p>
           <a:p>
@@ -3789,9 +3789,9 @@
                 <a:solidFill>
                   <a:srgbClr val="3C4450"/>
                 </a:solidFill>
-                <a:latin typeface="Arial"/>
+                <a:latin typeface="Trebuchet MS"/>
               </a:rPr>
-              <a:t>•  Consistent growth observed since January 2026.</a:t>
+              <a:t>•  Recent months indicate a positive trend in MRR performance.</a:t>
             </a:r>
           </a:p>
         </p:txBody>
@@ -3839,9 +3839,9 @@
             <a:r>
               <a:rPr sz="1300" b="1">
                 <a:solidFill>
-                  <a:srgbClr val="2E6DB4"/>
-                </a:solidFill>
-                <a:latin typeface="Arial"/>
+                  <a:srgbClr val="6C4BF0"/>
+                </a:solidFill>
+                <a:latin typeface="Trebuchet MS"/>
               </a:rPr>
               <a:t>PLAN BREAKDOWN</a:t>
             </a:r>
@@ -3873,11 +3873,11 @@
             <a:r>
               <a:rPr sz="3000" b="1">
                 <a:solidFill>
-                  <a:srgbClr val="1F2A44"/>
-                </a:solidFill>
-                <a:latin typeface="Georgia"/>
+                  <a:srgbClr val="211747"/>
+                </a:solidFill>
+                <a:latin typeface="Trebuchet MS"/>
               </a:rPr>
-              <a:t>Enterprise leads MRR at $805k, with a $20k increase from April.</a:t>
+              <a:t>Enterprise leads with $805k, showing a $20k increase from April.</a:t>
             </a:r>
           </a:p>
         </p:txBody>
@@ -3909,7 +3909,7 @@
                 <a:solidFill>
                   <a:srgbClr val="7A828C"/>
                 </a:solidFill>
-                <a:latin typeface="Arial"/>
+                <a:latin typeface="Trebuchet MS"/>
               </a:rPr>
               <a:t>Source: dim_plan: mrr by plan (2026-05), verified against the data.</a:t>
             </a:r>
@@ -3967,9 +3967,9 @@
                 <a:solidFill>
                   <a:srgbClr val="7A828C"/>
                 </a:solidFill>
-                <a:latin typeface="Arial"/>
+                <a:latin typeface="Trebuchet MS"/>
               </a:rPr>
-              <a:t>In May 2026, the Enterprise plan dominates the MRR breakdown, contributing $805k, which represents 51.6% of total MRR. The Business plan follows with $570k, down by $10k from the previous month. Notably, the Starter plan saw a positive shift, increasing by $9k to reach $184k.</a:t>
+              <a:t>In May 2026, the Enterprise plan dominates with a total MRR of $805k, representing 51.6% of total MRR. The Business plan follows at $570k, experiencing a decline of $10k from the previous month. The Starter plan increased by $9k to reach $184k, marking it as the biggest mover among the plans.</a:t>
             </a:r>
           </a:p>
         </p:txBody>
@@ -3989,7 +3989,7 @@
             <a:avLst/>
           </a:prstGeom>
           <a:solidFill>
-            <a:srgbClr val="1F2A44"/>
+            <a:srgbClr val="211747"/>
           </a:solidFill>
           <a:ln>
             <a:noFill/>
@@ -4020,7 +4020,7 @@
                 <a:solidFill>
                   <a:srgbClr val="FFFFFF"/>
                 </a:solidFill>
-                <a:latin typeface="Arial"/>
+                <a:latin typeface="Trebuchet MS"/>
               </a:rPr>
               <a:t>KEY TAKEAWAY</a:t>
             </a:r>
@@ -4079,7 +4079,7 @@
                 <a:solidFill>
                   <a:srgbClr val="3C4450"/>
                 </a:solidFill>
-                <a:latin typeface="Arial"/>
+                <a:latin typeface="Trebuchet MS"/>
               </a:rPr>
               <a:t>Focusing on the Enterprise plan's growth can drive overall revenue stability.</a:t>
             </a:r>
@@ -4095,9 +4095,9 @@
                 <a:solidFill>
                   <a:srgbClr val="3C4450"/>
                 </a:solidFill>
-                <a:latin typeface="Arial"/>
+                <a:latin typeface="Trebuchet MS"/>
               </a:rPr>
-              <a:t>•  Enterprise plan contributes $805k, leading MRR concentration.</a:t>
+              <a:t>•  Enterprise plan contributes 51.6% of total MRR with $805k.</a:t>
             </a:r>
           </a:p>
           <a:p>
@@ -4111,9 +4111,9 @@
                 <a:solidFill>
                   <a:srgbClr val="3C4450"/>
                 </a:solidFill>
-                <a:latin typeface="Arial"/>
+                <a:latin typeface="Trebuchet MS"/>
               </a:rPr>
-              <a:t>•  Business plan decreased by $10k, impacting overall growth.</a:t>
+              <a:t>•  Business plan decreased by $10k to $570k.</a:t>
             </a:r>
           </a:p>
           <a:p>
@@ -4127,9 +4127,9 @@
                 <a:solidFill>
                   <a:srgbClr val="3C4450"/>
                 </a:solidFill>
-                <a:latin typeface="Arial"/>
+                <a:latin typeface="Trebuchet MS"/>
               </a:rPr>
-              <a:t>•  Starter plan increased by $9k, showing positive momentum.</a:t>
+              <a:t>•  Starter plan grew by $9k to $184k, the largest increase.</a:t>
             </a:r>
           </a:p>
         </p:txBody>
@@ -4177,9 +4177,9 @@
             <a:r>
               <a:rPr sz="1300" b="1">
                 <a:solidFill>
-                  <a:srgbClr val="2E6DB4"/>
-                </a:solidFill>
-                <a:latin typeface="Arial"/>
+                  <a:srgbClr val="6C4BF0"/>
+                </a:solidFill>
+                <a:latin typeface="Trebuchet MS"/>
               </a:rPr>
               <a:t>REGION BREAKDOWN</a:t>
             </a:r>
@@ -4211,11 +4211,11 @@
             <a:r>
               <a:rPr sz="3000" b="1">
                 <a:solidFill>
-                  <a:srgbClr val="1F2A44"/>
-                </a:solidFill>
-                <a:latin typeface="Georgia"/>
+                  <a:srgbClr val="211747"/>
+                </a:solidFill>
+                <a:latin typeface="Trebuchet MS"/>
               </a:rPr>
-              <a:t>North America leads with $532k MRR, but LATAM shows the highest growth of +$21k.</a:t>
+              <a:t>North America leads MRR at $532k, but LATAM grows by $21k.</a:t>
             </a:r>
           </a:p>
         </p:txBody>
@@ -4247,7 +4247,7 @@
                 <a:solidFill>
                   <a:srgbClr val="7A828C"/>
                 </a:solidFill>
-                <a:latin typeface="Arial"/>
+                <a:latin typeface="Trebuchet MS"/>
               </a:rPr>
               <a:t>Source: dim_region: mrr by region (2026-05), verified against the data.</a:t>
             </a:r>
@@ -4305,9 +4305,9 @@
                 <a:solidFill>
                   <a:srgbClr val="7A828C"/>
                 </a:solidFill>
-                <a:latin typeface="Arial"/>
+                <a:latin typeface="Trebuchet MS"/>
               </a:rPr>
-              <a:t>In May 2026, North America dominates with $532k in Monthly Recurring Revenue (MRR), accounting for 34.1% of total MRR. LATAM is the standout performer, increasing by $21k from the previous month, while North America experienced a decline of $14k. EMEA and APAC also saw modest gains, with EMEA up by $7k and APAC by $3k.</a:t>
+              <a:t>In May 2026, North America dominates with an MRR of $532k, representing 34.1% of total MRR across regions. LATAM shows the most significant growth, increasing by $21k to reach $270k, while EMEA and APAC also experience modest gains. However, North America declines by $14k compared to the previous month, indicating potential challenges in maintaining its lead.</a:t>
             </a:r>
           </a:p>
         </p:txBody>
@@ -4327,7 +4327,7 @@
             <a:avLst/>
           </a:prstGeom>
           <a:solidFill>
-            <a:srgbClr val="1F2A44"/>
+            <a:srgbClr val="211747"/>
           </a:solidFill>
           <a:ln>
             <a:noFill/>
@@ -4358,7 +4358,7 @@
                 <a:solidFill>
                   <a:srgbClr val="FFFFFF"/>
                 </a:solidFill>
-                <a:latin typeface="Arial"/>
+                <a:latin typeface="Trebuchet MS"/>
               </a:rPr>
               <a:t>KEY TAKEAWAY</a:t>
             </a:r>
@@ -4417,9 +4417,9 @@
                 <a:solidFill>
                   <a:srgbClr val="3C4450"/>
                 </a:solidFill>
-                <a:latin typeface="Arial"/>
+                <a:latin typeface="Trebuchet MS"/>
               </a:rPr>
-              <a:t>Focusing on LATAM's growth potential could enhance overall revenue performance.</a:t>
+              <a:t>Focus on LATAM's growth potential while addressing North America's declining trend.</a:t>
             </a:r>
           </a:p>
           <a:p>
@@ -4433,9 +4433,9 @@
                 <a:solidFill>
                   <a:srgbClr val="3C4450"/>
                 </a:solidFill>
-                <a:latin typeface="Arial"/>
+                <a:latin typeface="Trebuchet MS"/>
               </a:rPr>
-              <a:t>•  North America: $532k, 34.1% of total MRR</a:t>
+              <a:t>•  North America: $532k MRR, 34.1% of total MRR.</a:t>
             </a:r>
           </a:p>
           <a:p>
@@ -4449,9 +4449,9 @@
                 <a:solidFill>
                   <a:srgbClr val="3C4450"/>
                 </a:solidFill>
-                <a:latin typeface="Arial"/>
+                <a:latin typeface="Trebuchet MS"/>
               </a:rPr>
-              <a:t>•  LATAM growth: +$21k, highest increase</a:t>
+              <a:t>•  LATAM grows by $21k, the largest increase among regions.</a:t>
             </a:r>
           </a:p>
           <a:p>
@@ -4465,9 +4465,9 @@
                 <a:solidFill>
                   <a:srgbClr val="3C4450"/>
                 </a:solidFill>
-                <a:latin typeface="Arial"/>
+                <a:latin typeface="Trebuchet MS"/>
               </a:rPr>
-              <a:t>•  EMEA and APAC show smaller gains of +$7k and +$3k, respectively.</a:t>
+              <a:t>•  EMEA and APAC see smaller gains of $7k and $3k, respectively.</a:t>
             </a:r>
           </a:p>
         </p:txBody>
@@ -4515,9 +4515,9 @@
             <a:r>
               <a:rPr sz="1300" b="1">
                 <a:solidFill>
-                  <a:srgbClr val="2E6DB4"/>
-                </a:solidFill>
-                <a:latin typeface="Arial"/>
+                  <a:srgbClr val="6C4BF0"/>
+                </a:solidFill>
+                <a:latin typeface="Trebuchet MS"/>
               </a:rPr>
               <a:t>RECOMMENDATIONS</a:t>
             </a:r>
@@ -4549,9 +4549,9 @@
             <a:r>
               <a:rPr sz="3000" b="1">
                 <a:solidFill>
-                  <a:srgbClr val="1F2A44"/>
-                </a:solidFill>
-                <a:latin typeface="Georgia"/>
+                  <a:srgbClr val="211747"/>
+                </a:solidFill>
+                <a:latin typeface="Trebuchet MS"/>
               </a:rPr>
               <a:t>Priorities for the coming month</a:t>
             </a:r>
@@ -4585,7 +4585,7 @@
                 <a:solidFill>
                   <a:srgbClr val="7A828C"/>
                 </a:solidFill>
-                <a:latin typeface="Arial"/>
+                <a:latin typeface="Trebuchet MS"/>
               </a:rPr>
               <a:t>Source: figures verified against the source data.</a:t>
             </a:r>
@@ -4624,9 +4624,9 @@
                 <a:solidFill>
                   <a:srgbClr val="3C4450"/>
                 </a:solidFill>
-                <a:latin typeface="Arial"/>
+                <a:latin typeface="Trebuchet MS"/>
               </a:rPr>
-              <a:t>1.   Enhance marketing efforts to boost the Business plan, which declined by -$10k.</a:t>
+              <a:t>1.   Increase focus on the Enterprise plan to sustain its $805k contribution to total mrr.</a:t>
             </a:r>
           </a:p>
           <a:p>
@@ -4640,9 +4640,9 @@
                 <a:solidFill>
                   <a:srgbClr val="3C4450"/>
                 </a:solidFill>
-                <a:latin typeface="Arial"/>
+                <a:latin typeface="Trebuchet MS"/>
               </a:rPr>
-              <a:t>2.   Leverage the strong performance of the Enterprise plan, contributing $805k or 51.6% of total MRR.</a:t>
+              <a:t>2.   Implement targeted strategies to recover the $10k decline in the Business plan.</a:t>
             </a:r>
           </a:p>
           <a:p>
@@ -4656,9 +4656,9 @@
                 <a:solidFill>
                   <a:srgbClr val="3C4450"/>
                 </a:solidFill>
-                <a:latin typeface="Arial"/>
+                <a:latin typeface="Trebuchet MS"/>
               </a:rPr>
-              <a:t>3.   Investigate and address the -$14k decline in North America to stabilize regional performance.</a:t>
+              <a:t>3.   Enhance marketing efforts in North America to address the $14k decline in the region.</a:t>
             </a:r>
           </a:p>
           <a:p>
@@ -4672,9 +4672,9 @@
                 <a:solidFill>
                   <a:srgbClr val="3C4450"/>
                 </a:solidFill>
-                <a:latin typeface="Arial"/>
+                <a:latin typeface="Trebuchet MS"/>
               </a:rPr>
-              <a:t>4.   Focus on customer retention strategies to maintain the overall MRR growth of +1.2%.</a:t>
+              <a:t>4.   Analyze customer feedback to identify and resolve issues affecting mrr growth.</a:t>
             </a:r>
           </a:p>
         </p:txBody>

--- a/app/examples/saas_metrics/report.pptx
+++ b/app/examples/saas_metrics/report.pptx
@@ -3095,14 +3095,58 @@
       <p:grpSpPr/>
       <p:sp>
         <p:nvSpPr>
-          <p:cNvPr id="2" name="TextBox 1"/>
+          <p:cNvPr id="2" name="Rectangle 1"/>
+          <p:cNvSpPr/>
+          <p:nvPr/>
+        </p:nvSpPr>
+        <p:spPr>
+          <a:xfrm>
+            <a:off x="0" y="0"/>
+            <a:ext cx="12191695" cy="6858000"/>
+          </a:xfrm>
+          <a:prstGeom prst="rect">
+            <a:avLst/>
+          </a:prstGeom>
+          <a:solidFill>
+            <a:srgbClr val="211747"/>
+          </a:solidFill>
+          <a:ln>
+            <a:noFill/>
+          </a:ln>
+          <a:effectLst/>
+        </p:spPr>
+        <p:style>
+          <a:lnRef idx="1">
+            <a:schemeClr val="accent1"/>
+          </a:lnRef>
+          <a:fillRef idx="3">
+            <a:schemeClr val="accent1"/>
+          </a:fillRef>
+          <a:effectRef idx="2">
+            <a:schemeClr val="accent1"/>
+          </a:effectRef>
+          <a:fontRef idx="minor">
+            <a:schemeClr val="lt1"/>
+          </a:fontRef>
+        </p:style>
+        <p:txBody>
+          <a:bodyPr rtlCol="0" anchor="ctr"/>
+          <a:lstStyle/>
+          <a:p>
+            <a:pPr algn="ctr"/>
+          </a:p>
+        </p:txBody>
+      </p:sp>
+      <p:sp>
+        <p:nvSpPr>
+          <p:cNvPr id="3" name="TextBox 2"/>
           <p:cNvSpPr txBox="1"/>
           <p:nvPr/>
         </p:nvSpPr>
         <p:spPr>
           <a:xfrm>
-            <a:off x="640080" y="2057400"/>
-            <a:ext cx="10881360" cy="1554480"/>
+            <a:off x="777240" y="2148840"/>
+            <a:ext cx="10607040" cy="365760"/>
           </a:xfrm>
           <a:prstGeom prst="rect">
             <a:avLst/>
@@ -3116,27 +3160,71 @@
           <a:lstStyle/>
           <a:p>
             <a:r>
-              <a:rPr sz="4600" b="1">
-                <a:solidFill>
-                  <a:srgbClr val="211747"/>
+              <a:rPr sz="1400" b="1">
+                <a:solidFill>
+                  <a:srgbClr val="6C4BF0"/>
                 </a:solidFill>
                 <a:latin typeface="Trebuchet MS"/>
               </a:rPr>
-              <a:t>Monthly MRR Performance Review</a:t>
-            </a:r>
-          </a:p>
-        </p:txBody>
-      </p:sp>
-      <p:sp>
-        <p:nvSpPr>
-          <p:cNvPr id="3" name="TextBox 2"/>
+              <a:t>PERFORMANCE REVIEW  ·  2026-05</a:t>
+            </a:r>
+          </a:p>
+        </p:txBody>
+      </p:sp>
+      <p:sp>
+        <p:nvSpPr>
+          <p:cNvPr id="4" name="Rectangle 3"/>
+          <p:cNvSpPr/>
+          <p:nvPr/>
+        </p:nvSpPr>
+        <p:spPr>
+          <a:xfrm>
+            <a:off x="822960" y="2697480"/>
+            <a:ext cx="1554480" cy="76200"/>
+          </a:xfrm>
+          <a:prstGeom prst="rect">
+            <a:avLst/>
+          </a:prstGeom>
+          <a:solidFill>
+            <a:srgbClr val="6C4BF0"/>
+          </a:solidFill>
+          <a:ln>
+            <a:noFill/>
+          </a:ln>
+          <a:effectLst/>
+        </p:spPr>
+        <p:style>
+          <a:lnRef idx="1">
+            <a:schemeClr val="accent1"/>
+          </a:lnRef>
+          <a:fillRef idx="3">
+            <a:schemeClr val="accent1"/>
+          </a:fillRef>
+          <a:effectRef idx="2">
+            <a:schemeClr val="accent1"/>
+          </a:effectRef>
+          <a:fontRef idx="minor">
+            <a:schemeClr val="lt1"/>
+          </a:fontRef>
+        </p:style>
+        <p:txBody>
+          <a:bodyPr rtlCol="0" anchor="ctr"/>
+          <a:lstStyle/>
+          <a:p>
+            <a:pPr algn="ctr"/>
+          </a:p>
+        </p:txBody>
+      </p:sp>
+      <p:sp>
+        <p:nvSpPr>
+          <p:cNvPr id="5" name="TextBox 4"/>
           <p:cNvSpPr txBox="1"/>
           <p:nvPr/>
         </p:nvSpPr>
         <p:spPr>
           <a:xfrm>
-            <a:off x="640080" y="3703320"/>
-            <a:ext cx="10881360" cy="548640"/>
+            <a:off x="731520" y="2926080"/>
+            <a:ext cx="10698480" cy="1828800"/>
           </a:xfrm>
           <a:prstGeom prst="rect">
             <a:avLst/>
@@ -3150,27 +3238,27 @@
           <a:lstStyle/>
           <a:p>
             <a:r>
-              <a:rPr sz="1700" b="0">
-                <a:solidFill>
-                  <a:srgbClr val="7A828C"/>
+              <a:rPr sz="4600" b="1">
+                <a:solidFill>
+                  <a:srgbClr val="FFFFFF"/>
                 </a:solidFill>
                 <a:latin typeface="Trebuchet MS"/>
               </a:rPr>
-              <a:t>Period 2026-05  |  source table: ex_saas_metrics</a:t>
-            </a:r>
-          </a:p>
-        </p:txBody>
-      </p:sp>
-      <p:sp>
-        <p:nvSpPr>
-          <p:cNvPr id="4" name="TextBox 3"/>
+              <a:t>Monthly MRR Performance Review</a:t>
+            </a:r>
+          </a:p>
+        </p:txBody>
+      </p:sp>
+      <p:sp>
+        <p:nvSpPr>
+          <p:cNvPr id="6" name="TextBox 5"/>
           <p:cNvSpPr txBox="1"/>
           <p:nvPr/>
         </p:nvSpPr>
         <p:spPr>
           <a:xfrm>
-            <a:off x="640080" y="4206240"/>
-            <a:ext cx="10881360" cy="457200"/>
+            <a:off x="777240" y="5029200"/>
+            <a:ext cx="10698480" cy="548640"/>
           </a:xfrm>
           <a:prstGeom prst="rect">
             <a:avLst/>
@@ -3184,13 +3272,13 @@
           <a:lstStyle/>
           <a:p>
             <a:r>
-              <a:rPr sz="1100" b="0">
-                <a:solidFill>
-                  <a:srgbClr val="7A828C"/>
+              <a:rPr sz="1700" b="0">
+                <a:solidFill>
+                  <a:srgbClr val="C0C5C9"/>
                 </a:solidFill>
                 <a:latin typeface="Trebuchet MS"/>
               </a:rPr>
-              <a:t>Generated 2026-06-10 17:37 UTC   |   CONFIDENTIAL</a:t>
+              <a:t>SaaS / Subscriptions dataset  ·  384 rows</a:t>
             </a:r>
           </a:p>
         </p:txBody>
@@ -3932,8 +4020,8 @@
         </p:blipFill>
         <p:spPr>
           <a:xfrm>
-            <a:off x="457200" y="1783080"/>
-            <a:ext cx="6949440" cy="3563815"/>
+            <a:off x="3264408" y="1645920"/>
+            <a:ext cx="5669280" cy="2907323"/>
           </a:xfrm>
           <a:prstGeom prst="rect">
             <a:avLst/>
@@ -3948,8 +4036,8 @@
         </p:nvSpPr>
         <p:spPr>
           <a:xfrm>
-            <a:off x="457200" y="5486400"/>
-            <a:ext cx="6949440" cy="868680"/>
+            <a:off x="457200" y="4572000"/>
+            <a:ext cx="11277295" cy="411480"/>
           </a:xfrm>
           <a:prstGeom prst="rect">
             <a:avLst/>
@@ -3962,14 +4050,15 @@
           </a:bodyPr>
           <a:lstStyle/>
           <a:p>
-            <a:r>
-              <a:rPr sz="1100" b="0">
-                <a:solidFill>
-                  <a:srgbClr val="7A828C"/>
+            <a:pPr algn="ctr"/>
+            <a:r>
+              <a:rPr sz="1300" b="1">
+                <a:solidFill>
+                  <a:srgbClr val="211747"/>
                 </a:solidFill>
                 <a:latin typeface="Trebuchet MS"/>
               </a:rPr>
-              <a:t>In May 2026, the Enterprise plan dominates with a total MRR of $805k, representing 51.6% of total MRR. The Business plan follows at $570k, experiencing a decline of $10k from the previous month. The Starter plan increased by $9k to reach $184k, marking it as the biggest mover among the plans.</a:t>
+              <a:t>Focusing on the Enterprise plan's growth can drive overall revenue stability.</a:t>
             </a:r>
           </a:p>
         </p:txBody>
@@ -3982,14 +4071,14 @@
         </p:nvSpPr>
         <p:spPr>
           <a:xfrm>
-            <a:off x="7772400" y="1783080"/>
-            <a:ext cx="3931920" cy="457200"/>
+            <a:off x="457200" y="5074920"/>
+            <a:ext cx="3454298" cy="50800"/>
           </a:xfrm>
           <a:prstGeom prst="rect">
             <a:avLst/>
           </a:prstGeom>
           <a:solidFill>
-            <a:srgbClr val="211747"/>
+            <a:srgbClr val="6C4BF0"/>
           </a:solidFill>
           <a:ln>
             <a:noFill/>
@@ -4011,43 +4100,100 @@
           </a:fontRef>
         </p:style>
         <p:txBody>
-          <a:bodyPr rtlCol="0" anchor="ctr" lIns="201168" tIns="18288" bIns="18288"/>
+          <a:bodyPr rtlCol="0" anchor="ctr"/>
           <a:lstStyle/>
           <a:p>
             <a:pPr algn="ctr"/>
-            <a:r>
-              <a:rPr sz="1200" b="1">
-                <a:solidFill>
-                  <a:srgbClr val="FFFFFF"/>
+          </a:p>
+        </p:txBody>
+      </p:sp>
+      <p:sp>
+        <p:nvSpPr>
+          <p:cNvPr id="8" name="TextBox 7"/>
+          <p:cNvSpPr txBox="1"/>
+          <p:nvPr/>
+        </p:nvSpPr>
+        <p:spPr>
+          <a:xfrm>
+            <a:off x="457200" y="5184648"/>
+            <a:ext cx="3454298" cy="777240"/>
+          </a:xfrm>
+          <a:prstGeom prst="rect">
+            <a:avLst/>
+          </a:prstGeom>
+          <a:noFill/>
+        </p:spPr>
+        <p:txBody>
+          <a:bodyPr wrap="square">
+            <a:spAutoFit/>
+          </a:bodyPr>
+          <a:lstStyle/>
+          <a:p>
+            <a:r>
+              <a:rPr sz="3000" b="1">
+                <a:solidFill>
+                  <a:srgbClr val="211747"/>
                 </a:solidFill>
                 <a:latin typeface="Trebuchet MS"/>
               </a:rPr>
-              <a:t>KEY TAKEAWAY</a:t>
-            </a:r>
-          </a:p>
-        </p:txBody>
-      </p:sp>
-      <p:sp>
-        <p:nvSpPr>
-          <p:cNvPr id="8" name="Rectangle 7"/>
+              <a:t>$805k</a:t>
+            </a:r>
+          </a:p>
+        </p:txBody>
+      </p:sp>
+      <p:sp>
+        <p:nvSpPr>
+          <p:cNvPr id="9" name="TextBox 8"/>
+          <p:cNvSpPr txBox="1"/>
+          <p:nvPr/>
+        </p:nvSpPr>
+        <p:spPr>
+          <a:xfrm>
+            <a:off x="457200" y="5943600"/>
+            <a:ext cx="3454298" cy="502920"/>
+          </a:xfrm>
+          <a:prstGeom prst="rect">
+            <a:avLst/>
+          </a:prstGeom>
+          <a:noFill/>
+        </p:spPr>
+        <p:txBody>
+          <a:bodyPr wrap="square">
+            <a:spAutoFit/>
+          </a:bodyPr>
+          <a:lstStyle/>
+          <a:p>
+            <a:r>
+              <a:rPr sz="1200" b="0">
+                <a:solidFill>
+                  <a:srgbClr val="7A828C"/>
+                </a:solidFill>
+                <a:latin typeface="Trebuchet MS"/>
+              </a:rPr>
+              <a:t>Enterprise</a:t>
+            </a:r>
+          </a:p>
+        </p:txBody>
+      </p:sp>
+      <p:sp>
+        <p:nvSpPr>
+          <p:cNvPr id="10" name="Rectangle 9"/>
           <p:cNvSpPr/>
           <p:nvPr/>
         </p:nvSpPr>
         <p:spPr>
           <a:xfrm>
-            <a:off x="7772400" y="2240280"/>
-            <a:ext cx="3931920" cy="3200400"/>
+            <a:off x="4368698" y="5074920"/>
+            <a:ext cx="3454298" cy="50800"/>
           </a:xfrm>
           <a:prstGeom prst="rect">
             <a:avLst/>
           </a:prstGeom>
           <a:solidFill>
-            <a:srgbClr val="E6E8EB"/>
+            <a:srgbClr val="6C4BF0"/>
           </a:solidFill>
-          <a:ln w="9525">
-            <a:solidFill>
-              <a:srgbClr val="C0C5C9"/>
-            </a:solidFill>
+          <a:ln>
+            <a:noFill/>
           </a:ln>
           <a:effectLst/>
         </p:spPr>
@@ -4066,70 +4212,189 @@
           </a:fontRef>
         </p:style>
         <p:txBody>
-          <a:bodyPr rtlCol="0" anchor="t" wrap="square" lIns="219456" rIns="219456" tIns="237744"/>
-          <a:lstStyle/>
-          <a:p>
-            <a:pPr algn="l">
-              <a:spcAft>
-                <a:spcPts val="1600"/>
-              </a:spcAft>
-            </a:pPr>
-            <a:r>
-              <a:rPr sz="1300" b="0">
-                <a:solidFill>
-                  <a:srgbClr val="3C4450"/>
+          <a:bodyPr rtlCol="0" anchor="ctr"/>
+          <a:lstStyle/>
+          <a:p>
+            <a:pPr algn="ctr"/>
+          </a:p>
+        </p:txBody>
+      </p:sp>
+      <p:sp>
+        <p:nvSpPr>
+          <p:cNvPr id="11" name="TextBox 10"/>
+          <p:cNvSpPr txBox="1"/>
+          <p:nvPr/>
+        </p:nvSpPr>
+        <p:spPr>
+          <a:xfrm>
+            <a:off x="4368698" y="5184648"/>
+            <a:ext cx="3454298" cy="777240"/>
+          </a:xfrm>
+          <a:prstGeom prst="rect">
+            <a:avLst/>
+          </a:prstGeom>
+          <a:noFill/>
+        </p:spPr>
+        <p:txBody>
+          <a:bodyPr wrap="square">
+            <a:spAutoFit/>
+          </a:bodyPr>
+          <a:lstStyle/>
+          <a:p>
+            <a:r>
+              <a:rPr sz="3000" b="1">
+                <a:solidFill>
+                  <a:srgbClr val="211747"/>
                 </a:solidFill>
                 <a:latin typeface="Trebuchet MS"/>
               </a:rPr>
-              <a:t>Focusing on the Enterprise plan's growth can drive overall revenue stability.</a:t>
-            </a:r>
-          </a:p>
-          <a:p>
-            <a:pPr algn="l">
-              <a:spcAft>
-                <a:spcPts val="700"/>
-              </a:spcAft>
-            </a:pPr>
-            <a:r>
-              <a:rPr sz="1100" b="0">
-                <a:solidFill>
-                  <a:srgbClr val="3C4450"/>
+              <a:t>$570k</a:t>
+            </a:r>
+          </a:p>
+        </p:txBody>
+      </p:sp>
+      <p:sp>
+        <p:nvSpPr>
+          <p:cNvPr id="12" name="TextBox 11"/>
+          <p:cNvSpPr txBox="1"/>
+          <p:nvPr/>
+        </p:nvSpPr>
+        <p:spPr>
+          <a:xfrm>
+            <a:off x="4368698" y="5943600"/>
+            <a:ext cx="3454298" cy="502920"/>
+          </a:xfrm>
+          <a:prstGeom prst="rect">
+            <a:avLst/>
+          </a:prstGeom>
+          <a:noFill/>
+        </p:spPr>
+        <p:txBody>
+          <a:bodyPr wrap="square">
+            <a:spAutoFit/>
+          </a:bodyPr>
+          <a:lstStyle/>
+          <a:p>
+            <a:r>
+              <a:rPr sz="1200" b="0">
+                <a:solidFill>
+                  <a:srgbClr val="7A828C"/>
                 </a:solidFill>
                 <a:latin typeface="Trebuchet MS"/>
               </a:rPr>
-              <a:t>•  Enterprise plan contributes 51.6% of total MRR with $805k.</a:t>
-            </a:r>
-          </a:p>
-          <a:p>
-            <a:pPr algn="l">
-              <a:spcAft>
-                <a:spcPts val="700"/>
-              </a:spcAft>
-            </a:pPr>
-            <a:r>
-              <a:rPr sz="1100" b="0">
-                <a:solidFill>
-                  <a:srgbClr val="3C4450"/>
+              <a:t>Business</a:t>
+            </a:r>
+          </a:p>
+        </p:txBody>
+      </p:sp>
+      <p:sp>
+        <p:nvSpPr>
+          <p:cNvPr id="13" name="Rectangle 12"/>
+          <p:cNvSpPr/>
+          <p:nvPr/>
+        </p:nvSpPr>
+        <p:spPr>
+          <a:xfrm>
+            <a:off x="8280196" y="5074920"/>
+            <a:ext cx="3454298" cy="50800"/>
+          </a:xfrm>
+          <a:prstGeom prst="rect">
+            <a:avLst/>
+          </a:prstGeom>
+          <a:solidFill>
+            <a:srgbClr val="6C4BF0"/>
+          </a:solidFill>
+          <a:ln>
+            <a:noFill/>
+          </a:ln>
+          <a:effectLst/>
+        </p:spPr>
+        <p:style>
+          <a:lnRef idx="1">
+            <a:schemeClr val="accent1"/>
+          </a:lnRef>
+          <a:fillRef idx="3">
+            <a:schemeClr val="accent1"/>
+          </a:fillRef>
+          <a:effectRef idx="2">
+            <a:schemeClr val="accent1"/>
+          </a:effectRef>
+          <a:fontRef idx="minor">
+            <a:schemeClr val="lt1"/>
+          </a:fontRef>
+        </p:style>
+        <p:txBody>
+          <a:bodyPr rtlCol="0" anchor="ctr"/>
+          <a:lstStyle/>
+          <a:p>
+            <a:pPr algn="ctr"/>
+          </a:p>
+        </p:txBody>
+      </p:sp>
+      <p:sp>
+        <p:nvSpPr>
+          <p:cNvPr id="14" name="TextBox 13"/>
+          <p:cNvSpPr txBox="1"/>
+          <p:nvPr/>
+        </p:nvSpPr>
+        <p:spPr>
+          <a:xfrm>
+            <a:off x="8280196" y="5184648"/>
+            <a:ext cx="3454298" cy="777240"/>
+          </a:xfrm>
+          <a:prstGeom prst="rect">
+            <a:avLst/>
+          </a:prstGeom>
+          <a:noFill/>
+        </p:spPr>
+        <p:txBody>
+          <a:bodyPr wrap="square">
+            <a:spAutoFit/>
+          </a:bodyPr>
+          <a:lstStyle/>
+          <a:p>
+            <a:r>
+              <a:rPr sz="3000" b="1">
+                <a:solidFill>
+                  <a:srgbClr val="211747"/>
                 </a:solidFill>
                 <a:latin typeface="Trebuchet MS"/>
               </a:rPr>
-              <a:t>•  Business plan decreased by $10k to $570k.</a:t>
-            </a:r>
-          </a:p>
-          <a:p>
-            <a:pPr algn="l">
-              <a:spcAft>
-                <a:spcPts val="700"/>
-              </a:spcAft>
-            </a:pPr>
-            <a:r>
-              <a:rPr sz="1100" b="0">
-                <a:solidFill>
-                  <a:srgbClr val="3C4450"/>
+              <a:t>$184k</a:t>
+            </a:r>
+          </a:p>
+        </p:txBody>
+      </p:sp>
+      <p:sp>
+        <p:nvSpPr>
+          <p:cNvPr id="15" name="TextBox 14"/>
+          <p:cNvSpPr txBox="1"/>
+          <p:nvPr/>
+        </p:nvSpPr>
+        <p:spPr>
+          <a:xfrm>
+            <a:off x="8280196" y="5943600"/>
+            <a:ext cx="3454298" cy="502920"/>
+          </a:xfrm>
+          <a:prstGeom prst="rect">
+            <a:avLst/>
+          </a:prstGeom>
+          <a:noFill/>
+        </p:spPr>
+        <p:txBody>
+          <a:bodyPr wrap="square">
+            <a:spAutoFit/>
+          </a:bodyPr>
+          <a:lstStyle/>
+          <a:p>
+            <a:r>
+              <a:rPr sz="1200" b="0">
+                <a:solidFill>
+                  <a:srgbClr val="7A828C"/>
                 </a:solidFill>
                 <a:latin typeface="Trebuchet MS"/>
               </a:rPr>
-              <a:t>•  Starter plan grew by $9k to $184k, the largest increase.</a:t>
+              <a:t>Starter</a:t>
             </a:r>
           </a:p>
         </p:txBody>

--- a/app/examples/saas_metrics/report.pptx
+++ b/app/examples/saas_metrics/report.pptx
@@ -3145,8 +3145,8 @@
         </p:nvSpPr>
         <p:spPr>
           <a:xfrm>
-            <a:off x="777240" y="2148840"/>
-            <a:ext cx="10607040" cy="365760"/>
+            <a:off x="777240" y="777240"/>
+            <a:ext cx="10607040" cy="1828800"/>
           </a:xfrm>
           <a:prstGeom prst="rect">
             <a:avLst/>
@@ -3160,13 +3160,13 @@
           <a:lstStyle/>
           <a:p>
             <a:r>
-              <a:rPr sz="1400" b="1">
-                <a:solidFill>
-                  <a:srgbClr val="6C4BF0"/>
+              <a:rPr sz="4600" b="1">
+                <a:solidFill>
+                  <a:srgbClr val="FFFFFF"/>
                 </a:solidFill>
                 <a:latin typeface="Trebuchet MS"/>
               </a:rPr>
-              <a:t>PERFORMANCE REVIEW  ·  2026-05</a:t>
+              <a:t>Monthly MRR Performance Analysis</a:t>
             </a:r>
           </a:p>
         </p:txBody>
@@ -3179,7 +3179,7 @@
         </p:nvSpPr>
         <p:spPr>
           <a:xfrm>
-            <a:off x="822960" y="2697480"/>
+            <a:off x="822960" y="2743200"/>
             <a:ext cx="1554480" cy="76200"/>
           </a:xfrm>
           <a:prstGeom prst="rect">
@@ -3223,8 +3223,8 @@
         </p:nvSpPr>
         <p:spPr>
           <a:xfrm>
-            <a:off x="731520" y="2926080"/>
-            <a:ext cx="10698480" cy="1828800"/>
+            <a:off x="777240" y="2971800"/>
+            <a:ext cx="10607040" cy="548640"/>
           </a:xfrm>
           <a:prstGeom prst="rect">
             <a:avLst/>
@@ -3238,47 +3238,13 @@
           <a:lstStyle/>
           <a:p>
             <a:r>
-              <a:rPr sz="4600" b="1">
-                <a:solidFill>
-                  <a:srgbClr val="FFFFFF"/>
+              <a:rPr sz="1700" b="0">
+                <a:solidFill>
+                  <a:srgbClr val="C0C5C9"/>
                 </a:solidFill>
                 <a:latin typeface="Trebuchet MS"/>
               </a:rPr>
-              <a:t>Monthly MRR Performance Review</a:t>
-            </a:r>
-          </a:p>
-        </p:txBody>
-      </p:sp>
-      <p:sp>
-        <p:nvSpPr>
-          <p:cNvPr id="6" name="TextBox 5"/>
-          <p:cNvSpPr txBox="1"/>
-          <p:nvPr/>
-        </p:nvSpPr>
-        <p:spPr>
-          <a:xfrm>
-            <a:off x="777240" y="5029200"/>
-            <a:ext cx="10698480" cy="548640"/>
-          </a:xfrm>
-          <a:prstGeom prst="rect">
-            <a:avLst/>
-          </a:prstGeom>
-          <a:noFill/>
-        </p:spPr>
-        <p:txBody>
-          <a:bodyPr wrap="square">
-            <a:spAutoFit/>
-          </a:bodyPr>
-          <a:lstStyle/>
-          <a:p>
-            <a:r>
-              <a:rPr sz="1700" b="0">
-                <a:solidFill>
-                  <a:srgbClr val="C0C5C9"/>
-                </a:solidFill>
-                <a:latin typeface="Trebuchet MS"/>
-              </a:rPr>
-              <a:t>SaaS / Subscriptions dataset  ·  384 rows</a:t>
+              <a:t>SaaS / Subscriptions dataset  ·  1,152 rows</a:t>
             </a:r>
           </a:p>
         </p:txBody>
@@ -3364,7 +3330,7 @@
                 </a:solidFill>
                 <a:latin typeface="Trebuchet MS"/>
               </a:rPr>
-              <a:t>Sustained growth in MRR highlights resilience despite regional challenges.</a:t>
+              <a:t>Declines in MRR highlight critical areas for improvement.</a:t>
             </a:r>
           </a:p>
         </p:txBody>
@@ -3445,7 +3411,7 @@
                 </a:solidFill>
                 <a:latin typeface="Trebuchet MS"/>
               </a:rPr>
-              <a:t>Total MRR reached $1.56M in 2026-05, up +1.2% from $1.54M in 2026-04.</a:t>
+              <a:t>Total MRR decreased to $3.82M, down -1.4%.</a:t>
             </a:r>
           </a:p>
           <a:p>
@@ -3469,7 +3435,7 @@
                 </a:solidFill>
                 <a:latin typeface="Trebuchet MS"/>
               </a:rPr>
-              <a:t>Enterprise plan leads at $805k, representing 51.6% of total MRR.</a:t>
+              <a:t>Enterprise remains the top plan at $1.99M, constituting 52.2% of total MRR.</a:t>
             </a:r>
           </a:p>
           <a:p>
@@ -3493,7 +3459,7 @@
                 </a:solidFill>
                 <a:latin typeface="Trebuchet MS"/>
               </a:rPr>
-              <a:t>Business plan experienced a decline of -$10k compared to the prior month.</a:t>
+              <a:t>Business plan saw the largest decline of -$30k compared to the prior month.</a:t>
             </a:r>
           </a:p>
           <a:p>
@@ -3517,7 +3483,7 @@
                 </a:solidFill>
                 <a:latin typeface="Trebuchet MS"/>
               </a:rPr>
-              <a:t>North America remains the top region at $532k, accounting for 34.1% of total MRR.</a:t>
+              <a:t>The United States leads countries with $515k, making up 13.5% of total MRR.</a:t>
             </a:r>
           </a:p>
           <a:p>
@@ -3541,7 +3507,7 @@
                 </a:solidFill>
                 <a:latin typeface="Trebuchet MS"/>
               </a:rPr>
-              <a:t>North America saw a decline of -$14k versus the previous month.</a:t>
+              <a:t>The United States experienced a decline of -$43k from the previous month.</a:t>
             </a:r>
           </a:p>
         </p:txBody>
@@ -3627,7 +3593,7 @@
                 </a:solidFill>
                 <a:latin typeface="Trebuchet MS"/>
               </a:rPr>
-              <a:t>Total MRR reached $1.56M in May, marking a peak month performance.</a:t>
+              <a:t>Total MRR declined to $3.82M in May, down $53k from April.</a:t>
             </a:r>
           </a:p>
         </p:txBody>
@@ -3719,7 +3685,7 @@
                 </a:solidFill>
                 <a:latin typeface="Trebuchet MS"/>
               </a:rPr>
-              <a:t>In May 2026, total MRR increased to $1.56M from $1.54M in April, reflecting a growth of +1.2% or +$18k. This performance represents a seasonal peak, matching the highest MRR recorded in the past year. The trend shows consistent growth over the last several months, indicating a strong upward trajectory in monthly recurring revenue.</a:t>
+              <a:t>In May 2026, total MRR was $3.82M, reflecting a decrease of $53k or -1.4% from April's peak of $3.87M. This decline marks a slight downturn after reaching a high in April, which was the peak month for MRR. The trend over the past year shows fluctuations, with MRR generally increasing until April, indicating potential seasonal patterns.</a:t>
             </a:r>
           </a:p>
         </p:txBody>
@@ -3831,7 +3797,7 @@
                 </a:solidFill>
                 <a:latin typeface="Trebuchet MS"/>
               </a:rPr>
-              <a:t>Sustained growth in MRR highlights strong market demand and effective customer retention strategies.</a:t>
+              <a:t>The decline in MRR suggests a need for strategies to sustain growth beyond seasonal peaks.</a:t>
             </a:r>
           </a:p>
           <a:p>
@@ -3847,7 +3813,7 @@
                 </a:solidFill>
                 <a:latin typeface="Trebuchet MS"/>
               </a:rPr>
-              <a:t>•  May 2026 MRR matches the peak of $1.56M.</a:t>
+              <a:t>•  April 2026 was the peak month at $3.87M.</a:t>
             </a:r>
           </a:p>
           <a:p>
@@ -3863,7 +3829,7 @@
                 </a:solidFill>
                 <a:latin typeface="Trebuchet MS"/>
               </a:rPr>
-              <a:t>•  April 2026 MRR was $1.54M, showing steady growth.</a:t>
+              <a:t>•  May 2026's MRR is lower than the previous month.</a:t>
             </a:r>
           </a:p>
           <a:p>
@@ -3879,7 +3845,7 @@
                 </a:solidFill>
                 <a:latin typeface="Trebuchet MS"/>
               </a:rPr>
-              <a:t>•  Recent months indicate a positive trend in MRR performance.</a:t>
+              <a:t>•  Recent trend shows MRR has been increasing since January 2026.</a:t>
             </a:r>
           </a:p>
         </p:txBody>
@@ -3965,7 +3931,7 @@
                 </a:solidFill>
                 <a:latin typeface="Trebuchet MS"/>
               </a:rPr>
-              <a:t>Enterprise leads with $805k, showing a $20k increase from April.</a:t>
+              <a:t>Enterprise leads with $1.99M, while Business declines by $30k.</a:t>
             </a:r>
           </a:p>
         </p:txBody>
@@ -4020,8 +3986,8 @@
         </p:blipFill>
         <p:spPr>
           <a:xfrm>
-            <a:off x="3264408" y="1645920"/>
-            <a:ext cx="5669280" cy="2907323"/>
+            <a:off x="914400" y="1554480"/>
+            <a:ext cx="10332720" cy="3061547"/>
           </a:xfrm>
           <a:prstGeom prst="rect">
             <a:avLst/>
@@ -4030,48 +3996,13 @@
       </p:pic>
       <p:sp>
         <p:nvSpPr>
-          <p:cNvPr id="6" name="TextBox 5"/>
-          <p:cNvSpPr txBox="1"/>
-          <p:nvPr/>
-        </p:nvSpPr>
-        <p:spPr>
-          <a:xfrm>
-            <a:off x="457200" y="4572000"/>
-            <a:ext cx="11277295" cy="411480"/>
-          </a:xfrm>
-          <a:prstGeom prst="rect">
-            <a:avLst/>
-          </a:prstGeom>
-          <a:noFill/>
-        </p:spPr>
-        <p:txBody>
-          <a:bodyPr wrap="square">
-            <a:spAutoFit/>
-          </a:bodyPr>
-          <a:lstStyle/>
-          <a:p>
-            <a:pPr algn="ctr"/>
-            <a:r>
-              <a:rPr sz="1300" b="1">
-                <a:solidFill>
-                  <a:srgbClr val="211747"/>
-                </a:solidFill>
-                <a:latin typeface="Trebuchet MS"/>
-              </a:rPr>
-              <a:t>Focusing on the Enterprise plan's growth can drive overall revenue stability.</a:t>
-            </a:r>
-          </a:p>
-        </p:txBody>
-      </p:sp>
-      <p:sp>
-        <p:nvSpPr>
-          <p:cNvPr id="7" name="Rectangle 6"/>
+          <p:cNvPr id="6" name="Rectangle 5"/>
           <p:cNvSpPr/>
           <p:nvPr/>
         </p:nvSpPr>
         <p:spPr>
           <a:xfrm>
-            <a:off x="457200" y="5074920"/>
+            <a:off x="457200" y="4754880"/>
             <a:ext cx="3454298" cy="50800"/>
           </a:xfrm>
           <a:prstGeom prst="rect">
@@ -4109,14 +4040,14 @@
       </p:sp>
       <p:sp>
         <p:nvSpPr>
-          <p:cNvPr id="8" name="TextBox 7"/>
+          <p:cNvPr id="7" name="TextBox 6"/>
           <p:cNvSpPr txBox="1"/>
           <p:nvPr/>
         </p:nvSpPr>
         <p:spPr>
           <a:xfrm>
-            <a:off x="457200" y="5184648"/>
-            <a:ext cx="3454298" cy="777240"/>
+            <a:off x="457200" y="4846320"/>
+            <a:ext cx="3454298" cy="640080"/>
           </a:xfrm>
           <a:prstGeom prst="rect">
             <a:avLst/>
@@ -4130,27 +4061,27 @@
           <a:lstStyle/>
           <a:p>
             <a:r>
-              <a:rPr sz="3000" b="1">
+              <a:rPr sz="2700" b="1">
                 <a:solidFill>
                   <a:srgbClr val="211747"/>
                 </a:solidFill>
                 <a:latin typeface="Trebuchet MS"/>
               </a:rPr>
-              <a:t>$805k</a:t>
-            </a:r>
-          </a:p>
-        </p:txBody>
-      </p:sp>
-      <p:sp>
-        <p:nvSpPr>
-          <p:cNvPr id="9" name="TextBox 8"/>
+              <a:t>$1.99M</a:t>
+            </a:r>
+          </a:p>
+        </p:txBody>
+      </p:sp>
+      <p:sp>
+        <p:nvSpPr>
+          <p:cNvPr id="8" name="TextBox 7"/>
           <p:cNvSpPr txBox="1"/>
           <p:nvPr/>
         </p:nvSpPr>
         <p:spPr>
           <a:xfrm>
-            <a:off x="457200" y="5943600"/>
-            <a:ext cx="3454298" cy="502920"/>
+            <a:off x="457200" y="5468112"/>
+            <a:ext cx="3454298" cy="1417320"/>
           </a:xfrm>
           <a:prstGeom prst="rect">
             <a:avLst/>
@@ -4164,26 +4095,26 @@
           <a:lstStyle/>
           <a:p>
             <a:r>
-              <a:rPr sz="1200" b="0">
+              <a:rPr sz="1100" b="0">
                 <a:solidFill>
                   <a:srgbClr val="7A828C"/>
                 </a:solidFill>
                 <a:latin typeface="Trebuchet MS"/>
               </a:rPr>
-              <a:t>Enterprise</a:t>
-            </a:r>
-          </a:p>
-        </p:txBody>
-      </p:sp>
-      <p:sp>
-        <p:nvSpPr>
-          <p:cNvPr id="10" name="Rectangle 9"/>
+              <a:t>Enterprise plan contributes $1.99M, leading MRR concentration.</a:t>
+            </a:r>
+          </a:p>
+        </p:txBody>
+      </p:sp>
+      <p:sp>
+        <p:nvSpPr>
+          <p:cNvPr id="9" name="Rectangle 8"/>
           <p:cNvSpPr/>
           <p:nvPr/>
         </p:nvSpPr>
         <p:spPr>
           <a:xfrm>
-            <a:off x="4368698" y="5074920"/>
+            <a:off x="4368698" y="4754880"/>
             <a:ext cx="3454298" cy="50800"/>
           </a:xfrm>
           <a:prstGeom prst="rect">
@@ -4221,14 +4152,14 @@
       </p:sp>
       <p:sp>
         <p:nvSpPr>
-          <p:cNvPr id="11" name="TextBox 10"/>
+          <p:cNvPr id="10" name="TextBox 9"/>
           <p:cNvSpPr txBox="1"/>
           <p:nvPr/>
         </p:nvSpPr>
         <p:spPr>
           <a:xfrm>
-            <a:off x="4368698" y="5184648"/>
-            <a:ext cx="3454298" cy="777240"/>
+            <a:off x="4368698" y="4846320"/>
+            <a:ext cx="3454298" cy="640080"/>
           </a:xfrm>
           <a:prstGeom prst="rect">
             <a:avLst/>
@@ -4242,27 +4173,27 @@
           <a:lstStyle/>
           <a:p>
             <a:r>
-              <a:rPr sz="3000" b="1">
+              <a:rPr sz="2700" b="1">
                 <a:solidFill>
                   <a:srgbClr val="211747"/>
                 </a:solidFill>
                 <a:latin typeface="Trebuchet MS"/>
               </a:rPr>
-              <a:t>$570k</a:t>
-            </a:r>
-          </a:p>
-        </p:txBody>
-      </p:sp>
-      <p:sp>
-        <p:nvSpPr>
-          <p:cNvPr id="12" name="TextBox 11"/>
+              <a:t>$1.37M</a:t>
+            </a:r>
+          </a:p>
+        </p:txBody>
+      </p:sp>
+      <p:sp>
+        <p:nvSpPr>
+          <p:cNvPr id="11" name="TextBox 10"/>
           <p:cNvSpPr txBox="1"/>
           <p:nvPr/>
         </p:nvSpPr>
         <p:spPr>
           <a:xfrm>
-            <a:off x="4368698" y="5943600"/>
-            <a:ext cx="3454298" cy="502920"/>
+            <a:off x="4368698" y="5468112"/>
+            <a:ext cx="3454298" cy="1417320"/>
           </a:xfrm>
           <a:prstGeom prst="rect">
             <a:avLst/>
@@ -4276,26 +4207,26 @@
           <a:lstStyle/>
           <a:p>
             <a:r>
-              <a:rPr sz="1200" b="0">
+              <a:rPr sz="1100" b="0">
                 <a:solidFill>
                   <a:srgbClr val="7A828C"/>
                 </a:solidFill>
                 <a:latin typeface="Trebuchet MS"/>
               </a:rPr>
-              <a:t>Business</a:t>
-            </a:r>
-          </a:p>
-        </p:txBody>
-      </p:sp>
-      <p:sp>
-        <p:nvSpPr>
-          <p:cNvPr id="13" name="Rectangle 12"/>
+              <a:t>Business plan declines by $30k, signaling potential market challenges.</a:t>
+            </a:r>
+          </a:p>
+        </p:txBody>
+      </p:sp>
+      <p:sp>
+        <p:nvSpPr>
+          <p:cNvPr id="12" name="Rectangle 11"/>
           <p:cNvSpPr/>
           <p:nvPr/>
         </p:nvSpPr>
         <p:spPr>
           <a:xfrm>
-            <a:off x="8280196" y="5074920"/>
+            <a:off x="8280196" y="4754880"/>
             <a:ext cx="3454298" cy="50800"/>
           </a:xfrm>
           <a:prstGeom prst="rect">
@@ -4333,14 +4264,14 @@
       </p:sp>
       <p:sp>
         <p:nvSpPr>
-          <p:cNvPr id="14" name="TextBox 13"/>
+          <p:cNvPr id="13" name="TextBox 12"/>
           <p:cNvSpPr txBox="1"/>
           <p:nvPr/>
         </p:nvSpPr>
         <p:spPr>
           <a:xfrm>
-            <a:off x="8280196" y="5184648"/>
-            <a:ext cx="3454298" cy="777240"/>
+            <a:off x="8280196" y="4846320"/>
+            <a:ext cx="3454298" cy="640080"/>
           </a:xfrm>
           <a:prstGeom prst="rect">
             <a:avLst/>
@@ -4354,27 +4285,27 @@
           <a:lstStyle/>
           <a:p>
             <a:r>
-              <a:rPr sz="3000" b="1">
+              <a:rPr sz="2700" b="1">
                 <a:solidFill>
                   <a:srgbClr val="211747"/>
                 </a:solidFill>
                 <a:latin typeface="Trebuchet MS"/>
               </a:rPr>
-              <a:t>$184k</a:t>
-            </a:r>
-          </a:p>
-        </p:txBody>
-      </p:sp>
-      <p:sp>
-        <p:nvSpPr>
-          <p:cNvPr id="15" name="TextBox 14"/>
+              <a:t>$455k</a:t>
+            </a:r>
+          </a:p>
+        </p:txBody>
+      </p:sp>
+      <p:sp>
+        <p:nvSpPr>
+          <p:cNvPr id="14" name="TextBox 13"/>
           <p:cNvSpPr txBox="1"/>
           <p:nvPr/>
         </p:nvSpPr>
         <p:spPr>
           <a:xfrm>
-            <a:off x="8280196" y="5943600"/>
-            <a:ext cx="3454298" cy="502920"/>
+            <a:off x="8280196" y="5468112"/>
+            <a:ext cx="3454298" cy="1417320"/>
           </a:xfrm>
           <a:prstGeom prst="rect">
             <a:avLst/>
@@ -4388,13 +4319,13 @@
           <a:lstStyle/>
           <a:p>
             <a:r>
-              <a:rPr sz="1200" b="0">
+              <a:rPr sz="1100" b="0">
                 <a:solidFill>
                   <a:srgbClr val="7A828C"/>
                 </a:solidFill>
                 <a:latin typeface="Trebuchet MS"/>
               </a:rPr>
-              <a:t>Starter</a:t>
+              <a:t>Starter plan also decreases, reflecting broader issues in lower-tier offerings.</a:t>
             </a:r>
           </a:p>
         </p:txBody>
@@ -4446,7 +4377,7 @@
                 </a:solidFill>
                 <a:latin typeface="Trebuchet MS"/>
               </a:rPr>
-              <a:t>REGION BREAKDOWN</a:t>
+              <a:t>COUNTRY BREAKDOWN</a:t>
             </a:r>
           </a:p>
         </p:txBody>
@@ -4480,7 +4411,7 @@
                 </a:solidFill>
                 <a:latin typeface="Trebuchet MS"/>
               </a:rPr>
-              <a:t>North America leads MRR at $532k, but LATAM grows by $21k.</a:t>
+              <a:t>The United States leads MRR with $515k, but shows a decline of -$43k.</a:t>
             </a:r>
           </a:p>
         </p:txBody>
@@ -4514,7 +4445,7 @@
                 </a:solidFill>
                 <a:latin typeface="Trebuchet MS"/>
               </a:rPr>
-              <a:t>Source: dim_region: mrr by region (2026-05), verified against the data.</a:t>
+              <a:t>Source: dim_country: mrr by country (2026-05), verified against the data.</a:t>
             </a:r>
           </a:p>
         </p:txBody>
@@ -4572,7 +4503,7 @@
                 </a:solidFill>
                 <a:latin typeface="Trebuchet MS"/>
               </a:rPr>
-              <a:t>In May 2026, North America dominates with an MRR of $532k, representing 34.1% of total MRR across regions. LATAM shows the most significant growth, increasing by $21k to reach $270k, while EMEA and APAC also experience modest gains. However, North America declines by $14k compared to the previous month, indicating potential challenges in maintaining its lead.</a:t>
+              <a:t>In May 2026, the United States remains the top country for Monthly Recurring Revenue (MRR) at $515k, followed by the United Kingdom at $377k and Germany at $360k. However, the U.S. experienced a significant decline of -$43k compared to the previous month. Notably, France was the biggest mover, increasing its MRR by +$16k, indicating a positive trend amidst overall declines in other major markets.</a:t>
             </a:r>
           </a:p>
         </p:txBody>
@@ -4684,7 +4615,7 @@
                 </a:solidFill>
                 <a:latin typeface="Trebuchet MS"/>
               </a:rPr>
-              <a:t>Focus on LATAM's growth potential while addressing North America's declining trend.</a:t>
+              <a:t>This highlights the need for targeted strategies to stabilize and grow MRR in key markets.</a:t>
             </a:r>
           </a:p>
           <a:p>
@@ -4700,7 +4631,7 @@
                 </a:solidFill>
                 <a:latin typeface="Trebuchet MS"/>
               </a:rPr>
-              <a:t>•  North America: $532k MRR, 34.1% of total MRR.</a:t>
+              <a:t>•  Top three countries: United States ($515k), United Kingdom ($377k), Germany ($360k).</a:t>
             </a:r>
           </a:p>
           <a:p>
@@ -4716,7 +4647,7 @@
                 </a:solidFill>
                 <a:latin typeface="Trebuchet MS"/>
               </a:rPr>
-              <a:t>•  LATAM grows by $21k, the largest increase among regions.</a:t>
+              <a:t>•  France increased MRR by +$16k, contrasting with declines in other markets.</a:t>
             </a:r>
           </a:p>
           <a:p>
@@ -4732,7 +4663,7 @@
                 </a:solidFill>
                 <a:latin typeface="Trebuchet MS"/>
               </a:rPr>
-              <a:t>•  EMEA and APAC see smaller gains of $7k and $3k, respectively.</a:t>
+              <a:t>•  Concentration remains high with the top three countries accounting for a significant share of MRR.</a:t>
             </a:r>
           </a:p>
         </p:txBody>
@@ -4891,7 +4822,7 @@
                 </a:solidFill>
                 <a:latin typeface="Trebuchet MS"/>
               </a:rPr>
-              <a:t>1.   Increase focus on the Enterprise plan to sustain its $805k contribution to total mrr.</a:t>
+              <a:t>1.   Analyze the decline in the Business plan and implement corrective strategies to recover the -$30k loss.</a:t>
             </a:r>
           </a:p>
           <a:p>
@@ -4907,7 +4838,7 @@
                 </a:solidFill>
                 <a:latin typeface="Trebuchet MS"/>
               </a:rPr>
-              <a:t>2.   Implement targeted strategies to recover the $10k decline in the Business plan.</a:t>
+              <a:t>2.   Enhance marketing efforts in the United States to address the -$43k decline and boost engagement.</a:t>
             </a:r>
           </a:p>
           <a:p>
@@ -4923,7 +4854,7 @@
                 </a:solidFill>
                 <a:latin typeface="Trebuchet MS"/>
               </a:rPr>
-              <a:t>3.   Enhance marketing efforts in North America to address the $14k decline in the region.</a:t>
+              <a:t>3.   Focus on upselling and cross-selling opportunities within the Enterprise plan, which accounts for $1.99M or 52.2% of total MRR.</a:t>
             </a:r>
           </a:p>
           <a:p>
@@ -4939,7 +4870,7 @@
                 </a:solidFill>
                 <a:latin typeface="Trebuchet MS"/>
               </a:rPr>
-              <a:t>4.   Analyze customer feedback to identify and resolve issues affecting mrr growth.</a:t>
+              <a:t>4.   Conduct a competitive analysis to identify market trends affecting MRR and adjust pricing strategies accordingly.</a:t>
             </a:r>
           </a:p>
         </p:txBody>

--- a/app/examples/saas_metrics/report.pptx
+++ b/app/examples/saas_metrics/report.pptx
@@ -3095,20 +3095,54 @@
       <p:grpSpPr/>
       <p:sp>
         <p:nvSpPr>
-          <p:cNvPr id="2" name="Rectangle 1"/>
+          <p:cNvPr id="2" name="TextBox 1"/>
+          <p:cNvSpPr txBox="1"/>
+          <p:nvPr/>
+        </p:nvSpPr>
+        <p:spPr>
+          <a:xfrm>
+            <a:off x="777240" y="777240"/>
+            <a:ext cx="10607040" cy="1828800"/>
+          </a:xfrm>
+          <a:prstGeom prst="rect">
+            <a:avLst/>
+          </a:prstGeom>
+          <a:noFill/>
+        </p:spPr>
+        <p:txBody>
+          <a:bodyPr wrap="square">
+            <a:spAutoFit/>
+          </a:bodyPr>
+          <a:lstStyle/>
+          <a:p>
+            <a:r>
+              <a:rPr sz="4600" b="1">
+                <a:solidFill>
+                  <a:srgbClr val="163E66"/>
+                </a:solidFill>
+                <a:latin typeface="Trebuchet MS"/>
+              </a:rPr>
+              <a:t>Monthly MRR Performance Review</a:t>
+            </a:r>
+          </a:p>
+        </p:txBody>
+      </p:sp>
+      <p:sp>
+        <p:nvSpPr>
+          <p:cNvPr id="3" name="Rectangle 2"/>
           <p:cNvSpPr/>
           <p:nvPr/>
         </p:nvSpPr>
         <p:spPr>
           <a:xfrm>
-            <a:off x="0" y="0"/>
-            <a:ext cx="12191695" cy="6858000"/>
+            <a:off x="822960" y="2743200"/>
+            <a:ext cx="1554480" cy="76200"/>
           </a:xfrm>
           <a:prstGeom prst="rect">
             <a:avLst/>
           </a:prstGeom>
           <a:solidFill>
-            <a:srgbClr val="211747"/>
+            <a:srgbClr val="2E6DB4"/>
           </a:solidFill>
           <a:ln>
             <a:noFill/>
@@ -3139,14 +3173,14 @@
       </p:sp>
       <p:sp>
         <p:nvSpPr>
-          <p:cNvPr id="3" name="TextBox 2"/>
+          <p:cNvPr id="4" name="TextBox 3"/>
           <p:cNvSpPr txBox="1"/>
           <p:nvPr/>
         </p:nvSpPr>
         <p:spPr>
           <a:xfrm>
-            <a:off x="777240" y="777240"/>
-            <a:ext cx="10607040" cy="1828800"/>
+            <a:off x="777240" y="2971800"/>
+            <a:ext cx="10607040" cy="548640"/>
           </a:xfrm>
           <a:prstGeom prst="rect">
             <a:avLst/>
@@ -3160,87 +3194,9 @@
           <a:lstStyle/>
           <a:p>
             <a:r>
-              <a:rPr sz="4600" b="1">
-                <a:solidFill>
-                  <a:srgbClr val="FFFFFF"/>
-                </a:solidFill>
-                <a:latin typeface="Trebuchet MS"/>
-              </a:rPr>
-              <a:t>Monthly MRR Performance Analysis</a:t>
-            </a:r>
-          </a:p>
-        </p:txBody>
-      </p:sp>
-      <p:sp>
-        <p:nvSpPr>
-          <p:cNvPr id="4" name="Rectangle 3"/>
-          <p:cNvSpPr/>
-          <p:nvPr/>
-        </p:nvSpPr>
-        <p:spPr>
-          <a:xfrm>
-            <a:off x="822960" y="2743200"/>
-            <a:ext cx="1554480" cy="76200"/>
-          </a:xfrm>
-          <a:prstGeom prst="rect">
-            <a:avLst/>
-          </a:prstGeom>
-          <a:solidFill>
-            <a:srgbClr val="6C4BF0"/>
-          </a:solidFill>
-          <a:ln>
-            <a:noFill/>
-          </a:ln>
-          <a:effectLst/>
-        </p:spPr>
-        <p:style>
-          <a:lnRef idx="1">
-            <a:schemeClr val="accent1"/>
-          </a:lnRef>
-          <a:fillRef idx="3">
-            <a:schemeClr val="accent1"/>
-          </a:fillRef>
-          <a:effectRef idx="2">
-            <a:schemeClr val="accent1"/>
-          </a:effectRef>
-          <a:fontRef idx="minor">
-            <a:schemeClr val="lt1"/>
-          </a:fontRef>
-        </p:style>
-        <p:txBody>
-          <a:bodyPr rtlCol="0" anchor="ctr"/>
-          <a:lstStyle/>
-          <a:p>
-            <a:pPr algn="ctr"/>
-          </a:p>
-        </p:txBody>
-      </p:sp>
-      <p:sp>
-        <p:nvSpPr>
-          <p:cNvPr id="5" name="TextBox 4"/>
-          <p:cNvSpPr txBox="1"/>
-          <p:nvPr/>
-        </p:nvSpPr>
-        <p:spPr>
-          <a:xfrm>
-            <a:off x="777240" y="2971800"/>
-            <a:ext cx="10607040" cy="548640"/>
-          </a:xfrm>
-          <a:prstGeom prst="rect">
-            <a:avLst/>
-          </a:prstGeom>
-          <a:noFill/>
-        </p:spPr>
-        <p:txBody>
-          <a:bodyPr wrap="square">
-            <a:spAutoFit/>
-          </a:bodyPr>
-          <a:lstStyle/>
-          <a:p>
-            <a:r>
               <a:rPr sz="1700" b="0">
                 <a:solidFill>
-                  <a:srgbClr val="C0C5C9"/>
+                  <a:srgbClr val="7A828C"/>
                 </a:solidFill>
                 <a:latin typeface="Trebuchet MS"/>
               </a:rPr>
@@ -3292,7 +3248,7 @@
             <a:r>
               <a:rPr sz="1300" b="1">
                 <a:solidFill>
-                  <a:srgbClr val="6C4BF0"/>
+                  <a:srgbClr val="2E6DB4"/>
                 </a:solidFill>
                 <a:latin typeface="Trebuchet MS"/>
               </a:rPr>
@@ -3326,11 +3282,11 @@
             <a:r>
               <a:rPr sz="3000" b="1">
                 <a:solidFill>
-                  <a:srgbClr val="211747"/>
+                  <a:srgbClr val="163E66"/>
                 </a:solidFill>
                 <a:latin typeface="Trebuchet MS"/>
               </a:rPr>
-              <a:t>Declines in MRR highlight critical areas for improvement.</a:t>
+              <a:t>Declining MRR signals urgent need for strategic adjustments.</a:t>
             </a:r>
           </a:p>
         </p:txBody>
@@ -3399,7 +3355,7 @@
             <a:r>
               <a:rPr sz="1600" b="1">
                 <a:solidFill>
-                  <a:srgbClr val="6C4BF0"/>
+                  <a:srgbClr val="2E6DB4"/>
                 </a:solidFill>
               </a:rPr>
               <a:t>●  </a:t>
@@ -3411,7 +3367,7 @@
                 </a:solidFill>
                 <a:latin typeface="Trebuchet MS"/>
               </a:rPr>
-              <a:t>Total MRR decreased to $3.82M, down -1.4%.</a:t>
+              <a:t>Total MRR decreased to $3.82M, down -1.4% from $3.87M.</a:t>
             </a:r>
           </a:p>
           <a:p>
@@ -3423,7 +3379,7 @@
             <a:r>
               <a:rPr sz="1600" b="1">
                 <a:solidFill>
-                  <a:srgbClr val="6C4BF0"/>
+                  <a:srgbClr val="2E6DB4"/>
                 </a:solidFill>
               </a:rPr>
               <a:t>●  </a:t>
@@ -3435,7 +3391,7 @@
                 </a:solidFill>
                 <a:latin typeface="Trebuchet MS"/>
               </a:rPr>
-              <a:t>Enterprise remains the top plan at $1.99M, constituting 52.2% of total MRR.</a:t>
+              <a:t>Enterprise remains the top plan at $1.99M, contributing 52.2% of total MRR.</a:t>
             </a:r>
           </a:p>
           <a:p>
@@ -3447,7 +3403,7 @@
             <a:r>
               <a:rPr sz="1600" b="1">
                 <a:solidFill>
-                  <a:srgbClr val="6C4BF0"/>
+                  <a:srgbClr val="2E6DB4"/>
                 </a:solidFill>
               </a:rPr>
               <a:t>●  </a:t>
@@ -3459,7 +3415,7 @@
                 </a:solidFill>
                 <a:latin typeface="Trebuchet MS"/>
               </a:rPr>
-              <a:t>Business plan saw the largest decline of -$30k compared to the prior month.</a:t>
+              <a:t>Business plan experienced the largest decline at -$30k compared to the prior month.</a:t>
             </a:r>
           </a:p>
           <a:p>
@@ -3471,7 +3427,7 @@
             <a:r>
               <a:rPr sz="1600" b="1">
                 <a:solidFill>
-                  <a:srgbClr val="6C4BF0"/>
+                  <a:srgbClr val="2E6DB4"/>
                 </a:solidFill>
               </a:rPr>
               <a:t>●  </a:t>
@@ -3483,7 +3439,7 @@
                 </a:solidFill>
                 <a:latin typeface="Trebuchet MS"/>
               </a:rPr>
-              <a:t>The United States leads countries with $515k, making up 13.5% of total MRR.</a:t>
+              <a:t>United States leads countries with $515k, accounting for 13.5% of total MRR.</a:t>
             </a:r>
           </a:p>
           <a:p>
@@ -3495,7 +3451,7 @@
             <a:r>
               <a:rPr sz="1600" b="1">
                 <a:solidFill>
-                  <a:srgbClr val="6C4BF0"/>
+                  <a:srgbClr val="2E6DB4"/>
                 </a:solidFill>
               </a:rPr>
               <a:t>●  </a:t>
@@ -3507,7 +3463,7 @@
                 </a:solidFill>
                 <a:latin typeface="Trebuchet MS"/>
               </a:rPr>
-              <a:t>The United States experienced a decline of -$43k from the previous month.</a:t>
+              <a:t>United States saw a decline of -$43k from the previous month.</a:t>
             </a:r>
           </a:p>
         </p:txBody>
@@ -3555,7 +3511,7 @@
             <a:r>
               <a:rPr sz="1300" b="1">
                 <a:solidFill>
-                  <a:srgbClr val="6C4BF0"/>
+                  <a:srgbClr val="2E6DB4"/>
                 </a:solidFill>
                 <a:latin typeface="Trebuchet MS"/>
               </a:rPr>
@@ -3589,11 +3545,11 @@
             <a:r>
               <a:rPr sz="3000" b="1">
                 <a:solidFill>
-                  <a:srgbClr val="211747"/>
+                  <a:srgbClr val="163E66"/>
                 </a:solidFill>
                 <a:latin typeface="Trebuchet MS"/>
               </a:rPr>
-              <a:t>Total MRR declined to $3.82M in May, down $53k from April.</a:t>
+              <a:t>Total MRR decreased to $3.82M in May, down $53k from April.</a:t>
             </a:r>
           </a:p>
         </p:txBody>
@@ -3648,8 +3604,8 @@
         </p:blipFill>
         <p:spPr>
           <a:xfrm>
-            <a:off x="457200" y="1783080"/>
-            <a:ext cx="6949440" cy="3563815"/>
+            <a:off x="914400" y="1554480"/>
+            <a:ext cx="10332720" cy="3061547"/>
           </a:xfrm>
           <a:prstGeom prst="rect">
             <a:avLst/>
@@ -3658,54 +3614,20 @@
       </p:pic>
       <p:sp>
         <p:nvSpPr>
-          <p:cNvPr id="6" name="TextBox 5"/>
-          <p:cNvSpPr txBox="1"/>
-          <p:nvPr/>
-        </p:nvSpPr>
-        <p:spPr>
-          <a:xfrm>
-            <a:off x="457200" y="5486400"/>
-            <a:ext cx="6949440" cy="868680"/>
-          </a:xfrm>
-          <a:prstGeom prst="rect">
-            <a:avLst/>
-          </a:prstGeom>
-          <a:noFill/>
-        </p:spPr>
-        <p:txBody>
-          <a:bodyPr wrap="square">
-            <a:spAutoFit/>
-          </a:bodyPr>
-          <a:lstStyle/>
-          <a:p>
-            <a:r>
-              <a:rPr sz="1100" b="0">
-                <a:solidFill>
-                  <a:srgbClr val="7A828C"/>
-                </a:solidFill>
-                <a:latin typeface="Trebuchet MS"/>
-              </a:rPr>
-              <a:t>In May 2026, total MRR was $3.82M, reflecting a decrease of $53k or -1.4% from April's peak of $3.87M. This decline marks a slight downturn after reaching a high in April, which was the peak month for MRR. The trend over the past year shows fluctuations, with MRR generally increasing until April, indicating potential seasonal patterns.</a:t>
-            </a:r>
-          </a:p>
-        </p:txBody>
-      </p:sp>
-      <p:sp>
-        <p:nvSpPr>
-          <p:cNvPr id="7" name="Rectangle 6"/>
+          <p:cNvPr id="6" name="Rectangle 5"/>
           <p:cNvSpPr/>
           <p:nvPr/>
         </p:nvSpPr>
         <p:spPr>
           <a:xfrm>
-            <a:off x="7772400" y="1783080"/>
-            <a:ext cx="3931920" cy="457200"/>
+            <a:off x="457200" y="4754880"/>
+            <a:ext cx="2510713" cy="50800"/>
           </a:xfrm>
           <a:prstGeom prst="rect">
             <a:avLst/>
           </a:prstGeom>
           <a:solidFill>
-            <a:srgbClr val="211747"/>
+            <a:srgbClr val="2E6DB4"/>
           </a:solidFill>
           <a:ln>
             <a:noFill/>
@@ -3727,43 +3649,100 @@
           </a:fontRef>
         </p:style>
         <p:txBody>
-          <a:bodyPr rtlCol="0" anchor="ctr" lIns="201168" tIns="18288" bIns="18288"/>
+          <a:bodyPr rtlCol="0" anchor="ctr"/>
           <a:lstStyle/>
           <a:p>
             <a:pPr algn="ctr"/>
-            <a:r>
-              <a:rPr sz="1200" b="1">
-                <a:solidFill>
-                  <a:srgbClr val="FFFFFF"/>
+          </a:p>
+        </p:txBody>
+      </p:sp>
+      <p:sp>
+        <p:nvSpPr>
+          <p:cNvPr id="7" name="TextBox 6"/>
+          <p:cNvSpPr txBox="1"/>
+          <p:nvPr/>
+        </p:nvSpPr>
+        <p:spPr>
+          <a:xfrm>
+            <a:off x="457200" y="4846320"/>
+            <a:ext cx="2510713" cy="640080"/>
+          </a:xfrm>
+          <a:prstGeom prst="rect">
+            <a:avLst/>
+          </a:prstGeom>
+          <a:noFill/>
+        </p:spPr>
+        <p:txBody>
+          <a:bodyPr wrap="square">
+            <a:spAutoFit/>
+          </a:bodyPr>
+          <a:lstStyle/>
+          <a:p>
+            <a:r>
+              <a:rPr sz="2600" b="1">
+                <a:solidFill>
+                  <a:srgbClr val="163E66"/>
                 </a:solidFill>
                 <a:latin typeface="Trebuchet MS"/>
               </a:rPr>
-              <a:t>KEY TAKEAWAY</a:t>
-            </a:r>
-          </a:p>
-        </p:txBody>
-      </p:sp>
-      <p:sp>
-        <p:nvSpPr>
-          <p:cNvPr id="8" name="Rectangle 7"/>
+              <a:t>$3.82M</a:t>
+            </a:r>
+          </a:p>
+        </p:txBody>
+      </p:sp>
+      <p:sp>
+        <p:nvSpPr>
+          <p:cNvPr id="8" name="TextBox 7"/>
+          <p:cNvSpPr txBox="1"/>
+          <p:nvPr/>
+        </p:nvSpPr>
+        <p:spPr>
+          <a:xfrm>
+            <a:off x="457200" y="5468112"/>
+            <a:ext cx="2510713" cy="1417320"/>
+          </a:xfrm>
+          <a:prstGeom prst="rect">
+            <a:avLst/>
+          </a:prstGeom>
+          <a:noFill/>
+        </p:spPr>
+        <p:txBody>
+          <a:bodyPr wrap="square">
+            <a:spAutoFit/>
+          </a:bodyPr>
+          <a:lstStyle/>
+          <a:p>
+            <a:r>
+              <a:rPr sz="1100" b="0">
+                <a:solidFill>
+                  <a:srgbClr val="7A828C"/>
+                </a:solidFill>
+                <a:latin typeface="Trebuchet MS"/>
+              </a:rPr>
+              <a:t>Latest month (2026-05)</a:t>
+            </a:r>
+          </a:p>
+        </p:txBody>
+      </p:sp>
+      <p:sp>
+        <p:nvSpPr>
+          <p:cNvPr id="9" name="Rectangle 8"/>
           <p:cNvSpPr/>
           <p:nvPr/>
         </p:nvSpPr>
         <p:spPr>
           <a:xfrm>
-            <a:off x="7772400" y="2240280"/>
-            <a:ext cx="3931920" cy="3200400"/>
+            <a:off x="3379393" y="4754880"/>
+            <a:ext cx="2510713" cy="50800"/>
           </a:xfrm>
           <a:prstGeom prst="rect">
             <a:avLst/>
           </a:prstGeom>
           <a:solidFill>
-            <a:srgbClr val="E6E8EB"/>
+            <a:srgbClr val="2E6DB4"/>
           </a:solidFill>
-          <a:ln w="9525">
-            <a:solidFill>
-              <a:srgbClr val="C0C5C9"/>
-            </a:solidFill>
+          <a:ln>
+            <a:noFill/>
           </a:ln>
           <a:effectLst/>
         </p:spPr>
@@ -3782,70 +3761,301 @@
           </a:fontRef>
         </p:style>
         <p:txBody>
-          <a:bodyPr rtlCol="0" anchor="t" wrap="square" lIns="219456" rIns="219456" tIns="237744"/>
-          <a:lstStyle/>
-          <a:p>
-            <a:pPr algn="l">
-              <a:spcAft>
-                <a:spcPts val="1600"/>
-              </a:spcAft>
-            </a:pPr>
-            <a:r>
-              <a:rPr sz="1300" b="0">
-                <a:solidFill>
-                  <a:srgbClr val="3C4450"/>
+          <a:bodyPr rtlCol="0" anchor="ctr"/>
+          <a:lstStyle/>
+          <a:p>
+            <a:pPr algn="ctr"/>
+          </a:p>
+        </p:txBody>
+      </p:sp>
+      <p:sp>
+        <p:nvSpPr>
+          <p:cNvPr id="10" name="TextBox 9"/>
+          <p:cNvSpPr txBox="1"/>
+          <p:nvPr/>
+        </p:nvSpPr>
+        <p:spPr>
+          <a:xfrm>
+            <a:off x="3379393" y="4846320"/>
+            <a:ext cx="2510713" cy="640080"/>
+          </a:xfrm>
+          <a:prstGeom prst="rect">
+            <a:avLst/>
+          </a:prstGeom>
+          <a:noFill/>
+        </p:spPr>
+        <p:txBody>
+          <a:bodyPr wrap="square">
+            <a:spAutoFit/>
+          </a:bodyPr>
+          <a:lstStyle/>
+          <a:p>
+            <a:r>
+              <a:rPr sz="2600" b="1">
+                <a:solidFill>
+                  <a:srgbClr val="163E66"/>
                 </a:solidFill>
                 <a:latin typeface="Trebuchet MS"/>
               </a:rPr>
-              <a:t>The decline in MRR suggests a need for strategies to sustain growth beyond seasonal peaks.</a:t>
-            </a:r>
-          </a:p>
-          <a:p>
-            <a:pPr algn="l">
-              <a:spcAft>
-                <a:spcPts val="700"/>
-              </a:spcAft>
-            </a:pPr>
+              <a:t>$3.87M</a:t>
+            </a:r>
+          </a:p>
+        </p:txBody>
+      </p:sp>
+      <p:sp>
+        <p:nvSpPr>
+          <p:cNvPr id="11" name="TextBox 10"/>
+          <p:cNvSpPr txBox="1"/>
+          <p:nvPr/>
+        </p:nvSpPr>
+        <p:spPr>
+          <a:xfrm>
+            <a:off x="3379393" y="5468112"/>
+            <a:ext cx="2510713" cy="1417320"/>
+          </a:xfrm>
+          <a:prstGeom prst="rect">
+            <a:avLst/>
+          </a:prstGeom>
+          <a:noFill/>
+        </p:spPr>
+        <p:txBody>
+          <a:bodyPr wrap="square">
+            <a:spAutoFit/>
+          </a:bodyPr>
+          <a:lstStyle/>
+          <a:p>
             <a:r>
               <a:rPr sz="1100" b="0">
                 <a:solidFill>
-                  <a:srgbClr val="3C4450"/>
+                  <a:srgbClr val="7A828C"/>
                 </a:solidFill>
                 <a:latin typeface="Trebuchet MS"/>
               </a:rPr>
-              <a:t>•  April 2026 was the peak month at $3.87M.</a:t>
-            </a:r>
-          </a:p>
-          <a:p>
-            <a:pPr algn="l">
-              <a:spcAft>
-                <a:spcPts val="700"/>
-              </a:spcAft>
-            </a:pPr>
-            <a:r>
-              <a:rPr sz="1100" b="0">
-                <a:solidFill>
-                  <a:srgbClr val="3C4450"/>
+              <a:t>Peak month (2026-04)</a:t>
+            </a:r>
+          </a:p>
+        </p:txBody>
+      </p:sp>
+      <p:sp>
+        <p:nvSpPr>
+          <p:cNvPr id="12" name="Rectangle 11"/>
+          <p:cNvSpPr/>
+          <p:nvPr/>
+        </p:nvSpPr>
+        <p:spPr>
+          <a:xfrm>
+            <a:off x="6301587" y="4754880"/>
+            <a:ext cx="2510713" cy="50800"/>
+          </a:xfrm>
+          <a:prstGeom prst="rect">
+            <a:avLst/>
+          </a:prstGeom>
+          <a:solidFill>
+            <a:srgbClr val="2E6DB4"/>
+          </a:solidFill>
+          <a:ln>
+            <a:noFill/>
+          </a:ln>
+          <a:effectLst/>
+        </p:spPr>
+        <p:style>
+          <a:lnRef idx="1">
+            <a:schemeClr val="accent1"/>
+          </a:lnRef>
+          <a:fillRef idx="3">
+            <a:schemeClr val="accent1"/>
+          </a:fillRef>
+          <a:effectRef idx="2">
+            <a:schemeClr val="accent1"/>
+          </a:effectRef>
+          <a:fontRef idx="minor">
+            <a:schemeClr val="lt1"/>
+          </a:fontRef>
+        </p:style>
+        <p:txBody>
+          <a:bodyPr rtlCol="0" anchor="ctr"/>
+          <a:lstStyle/>
+          <a:p>
+            <a:pPr algn="ctr"/>
+          </a:p>
+        </p:txBody>
+      </p:sp>
+      <p:sp>
+        <p:nvSpPr>
+          <p:cNvPr id="13" name="TextBox 12"/>
+          <p:cNvSpPr txBox="1"/>
+          <p:nvPr/>
+        </p:nvSpPr>
+        <p:spPr>
+          <a:xfrm>
+            <a:off x="6301587" y="4846320"/>
+            <a:ext cx="2510713" cy="640080"/>
+          </a:xfrm>
+          <a:prstGeom prst="rect">
+            <a:avLst/>
+          </a:prstGeom>
+          <a:noFill/>
+        </p:spPr>
+        <p:txBody>
+          <a:bodyPr wrap="square">
+            <a:spAutoFit/>
+          </a:bodyPr>
+          <a:lstStyle/>
+          <a:p>
+            <a:r>
+              <a:rPr sz="2600" b="1">
+                <a:solidFill>
+                  <a:srgbClr val="163E66"/>
                 </a:solidFill>
                 <a:latin typeface="Trebuchet MS"/>
               </a:rPr>
-              <a:t>•  May 2026's MRR is lower than the previous month.</a:t>
-            </a:r>
-          </a:p>
-          <a:p>
-            <a:pPr algn="l">
-              <a:spcAft>
-                <a:spcPts val="700"/>
-              </a:spcAft>
-            </a:pPr>
+              <a:t>$3.28M</a:t>
+            </a:r>
+          </a:p>
+        </p:txBody>
+      </p:sp>
+      <p:sp>
+        <p:nvSpPr>
+          <p:cNvPr id="14" name="TextBox 13"/>
+          <p:cNvSpPr txBox="1"/>
+          <p:nvPr/>
+        </p:nvSpPr>
+        <p:spPr>
+          <a:xfrm>
+            <a:off x="6301587" y="5468112"/>
+            <a:ext cx="2510713" cy="1417320"/>
+          </a:xfrm>
+          <a:prstGeom prst="rect">
+            <a:avLst/>
+          </a:prstGeom>
+          <a:noFill/>
+        </p:spPr>
+        <p:txBody>
+          <a:bodyPr wrap="square">
+            <a:spAutoFit/>
+          </a:bodyPr>
+          <a:lstStyle/>
+          <a:p>
             <a:r>
               <a:rPr sz="1100" b="0">
                 <a:solidFill>
-                  <a:srgbClr val="3C4450"/>
+                  <a:srgbClr val="7A828C"/>
                 </a:solidFill>
                 <a:latin typeface="Trebuchet MS"/>
               </a:rPr>
-              <a:t>•  Recent trend shows MRR has been increasing since January 2026.</a:t>
+              <a:t>Lowest month (2025-07)</a:t>
+            </a:r>
+          </a:p>
+        </p:txBody>
+      </p:sp>
+      <p:sp>
+        <p:nvSpPr>
+          <p:cNvPr id="15" name="Rectangle 14"/>
+          <p:cNvSpPr/>
+          <p:nvPr/>
+        </p:nvSpPr>
+        <p:spPr>
+          <a:xfrm>
+            <a:off x="9223781" y="4754880"/>
+            <a:ext cx="2510713" cy="50800"/>
+          </a:xfrm>
+          <a:prstGeom prst="rect">
+            <a:avLst/>
+          </a:prstGeom>
+          <a:solidFill>
+            <a:srgbClr val="2E6DB4"/>
+          </a:solidFill>
+          <a:ln>
+            <a:noFill/>
+          </a:ln>
+          <a:effectLst/>
+        </p:spPr>
+        <p:style>
+          <a:lnRef idx="1">
+            <a:schemeClr val="accent1"/>
+          </a:lnRef>
+          <a:fillRef idx="3">
+            <a:schemeClr val="accent1"/>
+          </a:fillRef>
+          <a:effectRef idx="2">
+            <a:schemeClr val="accent1"/>
+          </a:effectRef>
+          <a:fontRef idx="minor">
+            <a:schemeClr val="lt1"/>
+          </a:fontRef>
+        </p:style>
+        <p:txBody>
+          <a:bodyPr rtlCol="0" anchor="ctr"/>
+          <a:lstStyle/>
+          <a:p>
+            <a:pPr algn="ctr"/>
+          </a:p>
+        </p:txBody>
+      </p:sp>
+      <p:sp>
+        <p:nvSpPr>
+          <p:cNvPr id="16" name="TextBox 15"/>
+          <p:cNvSpPr txBox="1"/>
+          <p:nvPr/>
+        </p:nvSpPr>
+        <p:spPr>
+          <a:xfrm>
+            <a:off x="9223781" y="4846320"/>
+            <a:ext cx="2510713" cy="640080"/>
+          </a:xfrm>
+          <a:prstGeom prst="rect">
+            <a:avLst/>
+          </a:prstGeom>
+          <a:noFill/>
+        </p:spPr>
+        <p:txBody>
+          <a:bodyPr wrap="square">
+            <a:spAutoFit/>
+          </a:bodyPr>
+          <a:lstStyle/>
+          <a:p>
+            <a:r>
+              <a:rPr sz="2600" b="1">
+                <a:solidFill>
+                  <a:srgbClr val="163E66"/>
+                </a:solidFill>
+                <a:latin typeface="Trebuchet MS"/>
+              </a:rPr>
+              <a:t>+$512k</a:t>
+            </a:r>
+          </a:p>
+        </p:txBody>
+      </p:sp>
+      <p:sp>
+        <p:nvSpPr>
+          <p:cNvPr id="17" name="TextBox 16"/>
+          <p:cNvSpPr txBox="1"/>
+          <p:nvPr/>
+        </p:nvSpPr>
+        <p:spPr>
+          <a:xfrm>
+            <a:off x="9223781" y="5468112"/>
+            <a:ext cx="2510713" cy="1417320"/>
+          </a:xfrm>
+          <a:prstGeom prst="rect">
+            <a:avLst/>
+          </a:prstGeom>
+          <a:noFill/>
+        </p:spPr>
+        <p:txBody>
+          <a:bodyPr wrap="square">
+            <a:spAutoFit/>
+          </a:bodyPr>
+          <a:lstStyle/>
+          <a:p>
+            <a:r>
+              <a:rPr sz="1100" b="0">
+                <a:solidFill>
+                  <a:srgbClr val="7A828C"/>
+                </a:solidFill>
+                <a:latin typeface="Trebuchet MS"/>
+              </a:rPr>
+              <a:t>Change since 2025-06</a:t>
             </a:r>
           </a:p>
         </p:txBody>
@@ -3893,7 +4103,7 @@
             <a:r>
               <a:rPr sz="1300" b="1">
                 <a:solidFill>
-                  <a:srgbClr val="6C4BF0"/>
+                  <a:srgbClr val="2E6DB4"/>
                 </a:solidFill>
                 <a:latin typeface="Trebuchet MS"/>
               </a:rPr>
@@ -3927,11 +4137,11 @@
             <a:r>
               <a:rPr sz="3000" b="1">
                 <a:solidFill>
-                  <a:srgbClr val="211747"/>
+                  <a:srgbClr val="163E66"/>
                 </a:solidFill>
                 <a:latin typeface="Trebuchet MS"/>
               </a:rPr>
-              <a:t>Enterprise leads with $1.99M, while Business declines by $30k.</a:t>
+              <a:t>Enterprise leads MRR at $1.99M, with Business declining by $30k.</a:t>
             </a:r>
           </a:p>
         </p:txBody>
@@ -3986,8 +4196,8 @@
         </p:blipFill>
         <p:spPr>
           <a:xfrm>
-            <a:off x="914400" y="1554480"/>
-            <a:ext cx="10332720" cy="3061547"/>
+            <a:off x="457200" y="1783080"/>
+            <a:ext cx="6949440" cy="3563815"/>
           </a:xfrm>
           <a:prstGeom prst="rect">
             <a:avLst/>
@@ -3996,20 +4206,54 @@
       </p:pic>
       <p:sp>
         <p:nvSpPr>
-          <p:cNvPr id="6" name="Rectangle 5"/>
+          <p:cNvPr id="6" name="TextBox 5"/>
+          <p:cNvSpPr txBox="1"/>
+          <p:nvPr/>
+        </p:nvSpPr>
+        <p:spPr>
+          <a:xfrm>
+            <a:off x="457200" y="5486400"/>
+            <a:ext cx="6949440" cy="868680"/>
+          </a:xfrm>
+          <a:prstGeom prst="rect">
+            <a:avLst/>
+          </a:prstGeom>
+          <a:noFill/>
+        </p:spPr>
+        <p:txBody>
+          <a:bodyPr wrap="square">
+            <a:spAutoFit/>
+          </a:bodyPr>
+          <a:lstStyle/>
+          <a:p>
+            <a:r>
+              <a:rPr sz="1100" b="0">
+                <a:solidFill>
+                  <a:srgbClr val="7A828C"/>
+                </a:solidFill>
+                <a:latin typeface="Trebuchet MS"/>
+              </a:rPr>
+              <a:t>In May 2026, the Enterprise plan dominates with a total MRR of $1.99M, accounting for 52.2% of the overall MRR. The Business plan, while significant at $1.37M, experienced the largest decline of $30k compared to the previous month. The Starter plan also saw a decrease, falling to $455k from $471k, while the Free plan remains at $0.</a:t>
+            </a:r>
+          </a:p>
+        </p:txBody>
+      </p:sp>
+      <p:sp>
+        <p:nvSpPr>
+          <p:cNvPr id="7" name="Rectangle 6"/>
           <p:cNvSpPr/>
           <p:nvPr/>
         </p:nvSpPr>
         <p:spPr>
           <a:xfrm>
-            <a:off x="457200" y="4754880"/>
-            <a:ext cx="3454298" cy="50800"/>
+            <a:off x="7772400" y="1783080"/>
+            <a:ext cx="3931920" cy="457200"/>
           </a:xfrm>
           <a:prstGeom prst="rect">
             <a:avLst/>
           </a:prstGeom>
           <a:solidFill>
-            <a:srgbClr val="6C4BF0"/>
+            <a:srgbClr val="163E66"/>
           </a:solidFill>
           <a:ln>
             <a:noFill/>
@@ -4031,100 +4275,43 @@
           </a:fontRef>
         </p:style>
         <p:txBody>
-          <a:bodyPr rtlCol="0" anchor="ctr"/>
+          <a:bodyPr rtlCol="0" anchor="ctr" lIns="201168" tIns="18288" bIns="18288"/>
           <a:lstStyle/>
           <a:p>
             <a:pPr algn="ctr"/>
-          </a:p>
-        </p:txBody>
-      </p:sp>
-      <p:sp>
-        <p:nvSpPr>
-          <p:cNvPr id="7" name="TextBox 6"/>
-          <p:cNvSpPr txBox="1"/>
-          <p:nvPr/>
-        </p:nvSpPr>
-        <p:spPr>
-          <a:xfrm>
-            <a:off x="457200" y="4846320"/>
-            <a:ext cx="3454298" cy="640080"/>
-          </a:xfrm>
-          <a:prstGeom prst="rect">
-            <a:avLst/>
-          </a:prstGeom>
-          <a:noFill/>
-        </p:spPr>
-        <p:txBody>
-          <a:bodyPr wrap="square">
-            <a:spAutoFit/>
-          </a:bodyPr>
-          <a:lstStyle/>
-          <a:p>
-            <a:r>
-              <a:rPr sz="2700" b="1">
-                <a:solidFill>
-                  <a:srgbClr val="211747"/>
+            <a:r>
+              <a:rPr sz="1200" b="1">
+                <a:solidFill>
+                  <a:srgbClr val="FFFFFF"/>
                 </a:solidFill>
                 <a:latin typeface="Trebuchet MS"/>
               </a:rPr>
-              <a:t>$1.99M</a:t>
-            </a:r>
-          </a:p>
-        </p:txBody>
-      </p:sp>
-      <p:sp>
-        <p:nvSpPr>
-          <p:cNvPr id="8" name="TextBox 7"/>
-          <p:cNvSpPr txBox="1"/>
-          <p:nvPr/>
-        </p:nvSpPr>
-        <p:spPr>
-          <a:xfrm>
-            <a:off x="457200" y="5468112"/>
-            <a:ext cx="3454298" cy="1417320"/>
-          </a:xfrm>
-          <a:prstGeom prst="rect">
-            <a:avLst/>
-          </a:prstGeom>
-          <a:noFill/>
-        </p:spPr>
-        <p:txBody>
-          <a:bodyPr wrap="square">
-            <a:spAutoFit/>
-          </a:bodyPr>
-          <a:lstStyle/>
-          <a:p>
-            <a:r>
-              <a:rPr sz="1100" b="0">
-                <a:solidFill>
-                  <a:srgbClr val="7A828C"/>
-                </a:solidFill>
-                <a:latin typeface="Trebuchet MS"/>
-              </a:rPr>
-              <a:t>Enterprise plan contributes $1.99M, leading MRR concentration.</a:t>
-            </a:r>
-          </a:p>
-        </p:txBody>
-      </p:sp>
-      <p:sp>
-        <p:nvSpPr>
-          <p:cNvPr id="9" name="Rectangle 8"/>
+              <a:t>KEY TAKEAWAY</a:t>
+            </a:r>
+          </a:p>
+        </p:txBody>
+      </p:sp>
+      <p:sp>
+        <p:nvSpPr>
+          <p:cNvPr id="8" name="Rectangle 7"/>
           <p:cNvSpPr/>
           <p:nvPr/>
         </p:nvSpPr>
         <p:spPr>
           <a:xfrm>
-            <a:off x="4368698" y="4754880"/>
-            <a:ext cx="3454298" cy="50800"/>
+            <a:off x="7772400" y="2240280"/>
+            <a:ext cx="3931920" cy="3200400"/>
           </a:xfrm>
           <a:prstGeom prst="rect">
             <a:avLst/>
           </a:prstGeom>
           <a:solidFill>
-            <a:srgbClr val="6C4BF0"/>
+            <a:srgbClr val="E6E8EB"/>
           </a:solidFill>
-          <a:ln>
-            <a:noFill/>
+          <a:ln w="9525">
+            <a:solidFill>
+              <a:srgbClr val="C0C5C9"/>
+            </a:solidFill>
           </a:ln>
           <a:effectLst/>
         </p:spPr>
@@ -4143,189 +4330,70 @@
           </a:fontRef>
         </p:style>
         <p:txBody>
-          <a:bodyPr rtlCol="0" anchor="ctr"/>
-          <a:lstStyle/>
-          <a:p>
-            <a:pPr algn="ctr"/>
-          </a:p>
-        </p:txBody>
-      </p:sp>
-      <p:sp>
-        <p:nvSpPr>
-          <p:cNvPr id="10" name="TextBox 9"/>
-          <p:cNvSpPr txBox="1"/>
-          <p:nvPr/>
-        </p:nvSpPr>
-        <p:spPr>
-          <a:xfrm>
-            <a:off x="4368698" y="4846320"/>
-            <a:ext cx="3454298" cy="640080"/>
-          </a:xfrm>
-          <a:prstGeom prst="rect">
-            <a:avLst/>
-          </a:prstGeom>
-          <a:noFill/>
-        </p:spPr>
-        <p:txBody>
-          <a:bodyPr wrap="square">
-            <a:spAutoFit/>
-          </a:bodyPr>
-          <a:lstStyle/>
-          <a:p>
-            <a:r>
-              <a:rPr sz="2700" b="1">
-                <a:solidFill>
-                  <a:srgbClr val="211747"/>
+          <a:bodyPr rtlCol="0" anchor="t" wrap="square" lIns="219456" rIns="219456" tIns="237744"/>
+          <a:lstStyle/>
+          <a:p>
+            <a:pPr algn="l">
+              <a:spcAft>
+                <a:spcPts val="1600"/>
+              </a:spcAft>
+            </a:pPr>
+            <a:r>
+              <a:rPr sz="1300" b="0">
+                <a:solidFill>
+                  <a:srgbClr val="3C4450"/>
                 </a:solidFill>
                 <a:latin typeface="Trebuchet MS"/>
               </a:rPr>
-              <a:t>$1.37M</a:t>
-            </a:r>
-          </a:p>
-        </p:txBody>
-      </p:sp>
-      <p:sp>
-        <p:nvSpPr>
-          <p:cNvPr id="11" name="TextBox 10"/>
-          <p:cNvSpPr txBox="1"/>
-          <p:nvPr/>
-        </p:nvSpPr>
-        <p:spPr>
-          <a:xfrm>
-            <a:off x="4368698" y="5468112"/>
-            <a:ext cx="3454298" cy="1417320"/>
-          </a:xfrm>
-          <a:prstGeom prst="rect">
-            <a:avLst/>
-          </a:prstGeom>
-          <a:noFill/>
-        </p:spPr>
-        <p:txBody>
-          <a:bodyPr wrap="square">
-            <a:spAutoFit/>
-          </a:bodyPr>
-          <a:lstStyle/>
-          <a:p>
+              <a:t>The decline in Business and Starter plans signals potential challenges in customer retention.</a:t>
+            </a:r>
+          </a:p>
+          <a:p>
+            <a:pPr algn="l">
+              <a:spcAft>
+                <a:spcPts val="700"/>
+              </a:spcAft>
+            </a:pPr>
             <a:r>
               <a:rPr sz="1100" b="0">
                 <a:solidFill>
-                  <a:srgbClr val="7A828C"/>
+                  <a:srgbClr val="3C4450"/>
                 </a:solidFill>
                 <a:latin typeface="Trebuchet MS"/>
               </a:rPr>
-              <a:t>Business plan declines by $30k, signaling potential market challenges.</a:t>
-            </a:r>
-          </a:p>
-        </p:txBody>
-      </p:sp>
-      <p:sp>
-        <p:nvSpPr>
-          <p:cNvPr id="12" name="Rectangle 11"/>
-          <p:cNvSpPr/>
-          <p:nvPr/>
-        </p:nvSpPr>
-        <p:spPr>
-          <a:xfrm>
-            <a:off x="8280196" y="4754880"/>
-            <a:ext cx="3454298" cy="50800"/>
-          </a:xfrm>
-          <a:prstGeom prst="rect">
-            <a:avLst/>
-          </a:prstGeom>
-          <a:solidFill>
-            <a:srgbClr val="6C4BF0"/>
-          </a:solidFill>
-          <a:ln>
-            <a:noFill/>
-          </a:ln>
-          <a:effectLst/>
-        </p:spPr>
-        <p:style>
-          <a:lnRef idx="1">
-            <a:schemeClr val="accent1"/>
-          </a:lnRef>
-          <a:fillRef idx="3">
-            <a:schemeClr val="accent1"/>
-          </a:fillRef>
-          <a:effectRef idx="2">
-            <a:schemeClr val="accent1"/>
-          </a:effectRef>
-          <a:fontRef idx="minor">
-            <a:schemeClr val="lt1"/>
-          </a:fontRef>
-        </p:style>
-        <p:txBody>
-          <a:bodyPr rtlCol="0" anchor="ctr"/>
-          <a:lstStyle/>
-          <a:p>
-            <a:pPr algn="ctr"/>
-          </a:p>
-        </p:txBody>
-      </p:sp>
-      <p:sp>
-        <p:nvSpPr>
-          <p:cNvPr id="13" name="TextBox 12"/>
-          <p:cNvSpPr txBox="1"/>
-          <p:nvPr/>
-        </p:nvSpPr>
-        <p:spPr>
-          <a:xfrm>
-            <a:off x="8280196" y="4846320"/>
-            <a:ext cx="3454298" cy="640080"/>
-          </a:xfrm>
-          <a:prstGeom prst="rect">
-            <a:avLst/>
-          </a:prstGeom>
-          <a:noFill/>
-        </p:spPr>
-        <p:txBody>
-          <a:bodyPr wrap="square">
-            <a:spAutoFit/>
-          </a:bodyPr>
-          <a:lstStyle/>
-          <a:p>
-            <a:r>
-              <a:rPr sz="2700" b="1">
-                <a:solidFill>
-                  <a:srgbClr val="211747"/>
+              <a:t>•  Enterprise plan contributes $1.99M, leading overall MRR.</a:t>
+            </a:r>
+          </a:p>
+          <a:p>
+            <a:pPr algn="l">
+              <a:spcAft>
+                <a:spcPts val="700"/>
+              </a:spcAft>
+            </a:pPr>
+            <a:r>
+              <a:rPr sz="1100" b="0">
+                <a:solidFill>
+                  <a:srgbClr val="3C4450"/>
                 </a:solidFill>
                 <a:latin typeface="Trebuchet MS"/>
               </a:rPr>
-              <a:t>$455k</a:t>
-            </a:r>
-          </a:p>
-        </p:txBody>
-      </p:sp>
-      <p:sp>
-        <p:nvSpPr>
-          <p:cNvPr id="14" name="TextBox 13"/>
-          <p:cNvSpPr txBox="1"/>
-          <p:nvPr/>
-        </p:nvSpPr>
-        <p:spPr>
-          <a:xfrm>
-            <a:off x="8280196" y="5468112"/>
-            <a:ext cx="3454298" cy="1417320"/>
-          </a:xfrm>
-          <a:prstGeom prst="rect">
-            <a:avLst/>
-          </a:prstGeom>
-          <a:noFill/>
-        </p:spPr>
-        <p:txBody>
-          <a:bodyPr wrap="square">
-            <a:spAutoFit/>
-          </a:bodyPr>
-          <a:lstStyle/>
-          <a:p>
+              <a:t>•  Business plan's MRR decreased by $30k, the largest drop.</a:t>
+            </a:r>
+          </a:p>
+          <a:p>
+            <a:pPr algn="l">
+              <a:spcAft>
+                <a:spcPts val="700"/>
+              </a:spcAft>
+            </a:pPr>
             <a:r>
               <a:rPr sz="1100" b="0">
                 <a:solidFill>
-                  <a:srgbClr val="7A828C"/>
+                  <a:srgbClr val="3C4450"/>
                 </a:solidFill>
                 <a:latin typeface="Trebuchet MS"/>
               </a:rPr>
-              <a:t>Starter plan also decreases, reflecting broader issues in lower-tier offerings.</a:t>
+              <a:t>•  Starter plan's MRR fell to $455k, showing a downward trend.</a:t>
             </a:r>
           </a:p>
         </p:txBody>
@@ -4373,7 +4441,7 @@
             <a:r>
               <a:rPr sz="1300" b="1">
                 <a:solidFill>
-                  <a:srgbClr val="6C4BF0"/>
+                  <a:srgbClr val="2E6DB4"/>
                 </a:solidFill>
                 <a:latin typeface="Trebuchet MS"/>
               </a:rPr>
@@ -4407,11 +4475,11 @@
             <a:r>
               <a:rPr sz="3000" b="1">
                 <a:solidFill>
-                  <a:srgbClr val="211747"/>
+                  <a:srgbClr val="163E66"/>
                 </a:solidFill>
                 <a:latin typeface="Trebuchet MS"/>
               </a:rPr>
-              <a:t>The United States leads MRR with $515k, but shows a decline of -$43k.</a:t>
+              <a:t>The United States leads MRR at $515k, but decreased by -$43k this period.</a:t>
             </a:r>
           </a:p>
         </p:txBody>
@@ -4503,7 +4571,7 @@
                 </a:solidFill>
                 <a:latin typeface="Trebuchet MS"/>
               </a:rPr>
-              <a:t>In May 2026, the United States remains the top country for Monthly Recurring Revenue (MRR) at $515k, followed by the United Kingdom at $377k and Germany at $360k. However, the U.S. experienced a significant decline of -$43k compared to the previous month. Notably, France was the biggest mover, increasing its MRR by +$16k, indicating a positive trend amidst overall declines in other major markets.</a:t>
+              <a:t>In May 2026, the United States remains the top contributor to MRR with $515k, followed by the United Kingdom at $377k and Germany at $360k. The overall MRR concentration is significant, with the top three countries accounting for a substantial portion of total MRR. Notably, France is the biggest mover this period, increasing its MRR by +$16k compared to April 2026.</a:t>
             </a:r>
           </a:p>
         </p:txBody>
@@ -4523,7 +4591,7 @@
             <a:avLst/>
           </a:prstGeom>
           <a:solidFill>
-            <a:srgbClr val="211747"/>
+            <a:srgbClr val="163E66"/>
           </a:solidFill>
           <a:ln>
             <a:noFill/>
@@ -4615,7 +4683,7 @@
                 </a:solidFill>
                 <a:latin typeface="Trebuchet MS"/>
               </a:rPr>
-              <a:t>This highlights the need for targeted strategies to stabilize and grow MRR in key markets.</a:t>
+              <a:t>This shift highlights the need to address declining MRR in key markets while leveraging growth in others.</a:t>
             </a:r>
           </a:p>
           <a:p>
@@ -4631,7 +4699,7 @@
                 </a:solidFill>
                 <a:latin typeface="Trebuchet MS"/>
               </a:rPr>
-              <a:t>•  Top three countries: United States ($515k), United Kingdom ($377k), Germany ($360k).</a:t>
+              <a:t>•  Top three countries contribute significantly to overall MRR concentration.</a:t>
             </a:r>
           </a:p>
           <a:p>
@@ -4647,7 +4715,7 @@
                 </a:solidFill>
                 <a:latin typeface="Trebuchet MS"/>
               </a:rPr>
-              <a:t>•  France increased MRR by +$16k, contrasting with declines in other markets.</a:t>
+              <a:t>•  France's MRR increased by +$16k, indicating positive growth.</a:t>
             </a:r>
           </a:p>
           <a:p>
@@ -4663,7 +4731,7 @@
                 </a:solidFill>
                 <a:latin typeface="Trebuchet MS"/>
               </a:rPr>
-              <a:t>•  Concentration remains high with the top three countries accounting for a significant share of MRR.</a:t>
+              <a:t>•  The United States experienced the largest decline at -$43k.</a:t>
             </a:r>
           </a:p>
         </p:txBody>
@@ -4711,7 +4779,7 @@
             <a:r>
               <a:rPr sz="1300" b="1">
                 <a:solidFill>
-                  <a:srgbClr val="6C4BF0"/>
+                  <a:srgbClr val="2E6DB4"/>
                 </a:solidFill>
                 <a:latin typeface="Trebuchet MS"/>
               </a:rPr>
@@ -4745,7 +4813,7 @@
             <a:r>
               <a:rPr sz="3000" b="1">
                 <a:solidFill>
-                  <a:srgbClr val="211747"/>
+                  <a:srgbClr val="163E66"/>
                 </a:solidFill>
                 <a:latin typeface="Trebuchet MS"/>
               </a:rPr>
@@ -4822,7 +4890,7 @@
                 </a:solidFill>
                 <a:latin typeface="Trebuchet MS"/>
               </a:rPr>
-              <a:t>1.   Analyze the decline in the Business plan and implement corrective strategies to recover the -$30k loss.</a:t>
+              <a:t>1.   Analyze and address the $30k decline in the Business plan to stabilize MRR.</a:t>
             </a:r>
           </a:p>
           <a:p>
@@ -4838,7 +4906,7 @@
                 </a:solidFill>
                 <a:latin typeface="Trebuchet MS"/>
               </a:rPr>
-              <a:t>2.   Enhance marketing efforts in the United States to address the -$43k decline and boost engagement.</a:t>
+              <a:t>2.   Enhance marketing strategies in the United States to recover the $43k decline in revenue.</a:t>
             </a:r>
           </a:p>
           <a:p>
@@ -4854,7 +4922,7 @@
                 </a:solidFill>
                 <a:latin typeface="Trebuchet MS"/>
               </a:rPr>
-              <a:t>3.   Focus on upselling and cross-selling opportunities within the Enterprise plan, which accounts for $1.99M or 52.2% of total MRR.</a:t>
+              <a:t>3.   Focus on increasing the Enterprise plan, which currently represents $1.99M or 52.2% of total MRR.</a:t>
             </a:r>
           </a:p>
           <a:p>
@@ -4870,7 +4938,7 @@
                 </a:solidFill>
                 <a:latin typeface="Trebuchet MS"/>
               </a:rPr>
-              <a:t>4.   Conduct a competitive analysis to identify market trends affecting MRR and adjust pricing strategies accordingly.</a:t>
+              <a:t>4.   Implement customer retention initiatives to prevent further declines in overall MRR, currently at $3.82M.</a:t>
             </a:r>
           </a:p>
         </p:txBody>

--- a/app/examples/saas_metrics/report.pptx
+++ b/app/examples/saas_metrics/report.pptx
@@ -3101,8 +3101,8 @@
         </p:nvSpPr>
         <p:spPr>
           <a:xfrm>
-            <a:off x="777240" y="777240"/>
-            <a:ext cx="10607040" cy="1828800"/>
+            <a:off x="777240" y="914400"/>
+            <a:ext cx="10607040" cy="5029200"/>
           </a:xfrm>
           <a:prstGeom prst="rect">
             <a:avLst/>
@@ -3110,11 +3110,16 @@
           <a:noFill/>
         </p:spPr>
         <p:txBody>
-          <a:bodyPr wrap="square">
+          <a:bodyPr wrap="square" anchor="ctr">
             <a:spAutoFit/>
           </a:bodyPr>
           <a:lstStyle/>
           <a:p>
+            <a:pPr>
+              <a:spcAft>
+                <a:spcPts val="1400"/>
+              </a:spcAft>
+            </a:pPr>
             <a:r>
               <a:rPr sz="4600" b="1">
                 <a:solidFill>
@@ -3125,73 +3130,6 @@
               <a:t>Monthly MRR Performance Review</a:t>
             </a:r>
           </a:p>
-        </p:txBody>
-      </p:sp>
-      <p:sp>
-        <p:nvSpPr>
-          <p:cNvPr id="3" name="Rectangle 2"/>
-          <p:cNvSpPr/>
-          <p:nvPr/>
-        </p:nvSpPr>
-        <p:spPr>
-          <a:xfrm>
-            <a:off x="822960" y="2743200"/>
-            <a:ext cx="1554480" cy="76200"/>
-          </a:xfrm>
-          <a:prstGeom prst="rect">
-            <a:avLst/>
-          </a:prstGeom>
-          <a:solidFill>
-            <a:srgbClr val="2E6DB4"/>
-          </a:solidFill>
-          <a:ln>
-            <a:noFill/>
-          </a:ln>
-          <a:effectLst/>
-        </p:spPr>
-        <p:style>
-          <a:lnRef idx="1">
-            <a:schemeClr val="accent1"/>
-          </a:lnRef>
-          <a:fillRef idx="3">
-            <a:schemeClr val="accent1"/>
-          </a:fillRef>
-          <a:effectRef idx="2">
-            <a:schemeClr val="accent1"/>
-          </a:effectRef>
-          <a:fontRef idx="minor">
-            <a:schemeClr val="lt1"/>
-          </a:fontRef>
-        </p:style>
-        <p:txBody>
-          <a:bodyPr rtlCol="0" anchor="ctr"/>
-          <a:lstStyle/>
-          <a:p>
-            <a:pPr algn="ctr"/>
-          </a:p>
-        </p:txBody>
-      </p:sp>
-      <p:sp>
-        <p:nvSpPr>
-          <p:cNvPr id="4" name="TextBox 3"/>
-          <p:cNvSpPr txBox="1"/>
-          <p:nvPr/>
-        </p:nvSpPr>
-        <p:spPr>
-          <a:xfrm>
-            <a:off x="777240" y="2971800"/>
-            <a:ext cx="10607040" cy="548640"/>
-          </a:xfrm>
-          <a:prstGeom prst="rect">
-            <a:avLst/>
-          </a:prstGeom>
-          <a:noFill/>
-        </p:spPr>
-        <p:txBody>
-          <a:bodyPr wrap="square">
-            <a:spAutoFit/>
-          </a:bodyPr>
-          <a:lstStyle/>
           <a:p>
             <a:r>
               <a:rPr sz="1700" b="0">
